--- a/slides/pptx/week03.pptx
+++ b/slides/pptx/week03.pptx
@@ -20,9 +20,10 @@
     <p:sldId id="268" r:id="rId14"/>
     <p:sldId id="269" r:id="rId15"/>
     <p:sldId id="270" r:id="rId16"/>
+    <p:sldId id="271" r:id="rId17"/>
   </p:sldIdLst>
   <p:notesMasterIdLst>
-    <p:notesMasterId r:id="rId17"/>
+    <p:notesMasterId r:id="rId18"/>
   </p:notesMasterIdLst>
   <p:sldSz cx="9144000" cy="5143500"/>
   <p:notesSz cx="5143500" cy="9144000"/>
@@ -780,7 +781,7 @@
           <a:p>
             <a:r>
               <a:rPr lang="en-US" dirty="0"/>
-              <a:t>Explain rounds before lab. Round 1 = instant-feedback fun; round 3 = the real learning (fix it). Leaderboard on round 1. ~3 min.</a:t>
+              <a:t>Explain rounds before lab. Round 1 = instant-feedback fun. Round 3 is NOT just "run the pre-fixed code and verify" — be precise that the rehash-on-login migration and the GCM decrypt/tamper-check are the parts students actually write; the rest of the fixed script is handed to them already implemented. Leaderboard on round 1. ~3 min.</a:t>
             </a:r>
             <a:endParaRPr lang="en-US" dirty="0"/>
           </a:p>
@@ -868,7 +869,7 @@
           <a:p>
             <a:r>
               <a:rPr lang="en-US" dirty="0"/>
-              <a:t>Graded output. Also: crack NoteVault's MD5 hashes for the project (worksheet). Point to vulnerable_crypto.py + solution_skeleton.py.</a:t>
+              <a:t>Graded output — six pieces, not three; don't let the deliverable slide undersell TLS (Task 8) or the evidence stamp (highest-impact single miss if skipped — output is byte-identical across the cohort without it). Point to vulnerable_crypto.py + solution_skeleton.py.</a:t>
             </a:r>
             <a:endParaRPr lang="en-US" dirty="0"/>
           </a:p>
@@ -956,7 +957,7 @@
           <a:p>
             <a:r>
               <a:rPr lang="en-US" dirty="0"/>
-              <a:t>Recap. Cold-call: "how should we store passwords, and why salted+slow?" ~2 min.</a:t>
+              <a:t>Graded output — six pieces, not three; don't let the deliverable slide undersell TLS (Task 8) or the evidence stamp (highest-impact single miss if skipped — output is byte-identical across the cohort without it). Point to vulnerable_crypto.py + solution_skeleton.py.</a:t>
             </a:r>
             <a:endParaRPr lang="en-US" dirty="0"/>
           </a:p>
@@ -1044,7 +1045,7 @@
           <a:p>
             <a:r>
               <a:rPr lang="en-US" dirty="0"/>
-              <a:t>Cliffhanger: "Next week — type one quote mark and log in as admin." Remind: hashcat + wordlist ready.</a:t>
+              <a:t>Recap. Cold-call: "how should we store passwords, and why salted+slow?" ~2 min.</a:t>
             </a:r>
             <a:endParaRPr lang="en-US" dirty="0"/>
           </a:p>
@@ -1068,6 +1069,94 @@
             <a:fld id="{F7021451-1387-4CA6-816F-3879F97B5CBC}" type="slidenum">
               <a:rPr lang="en-US"/>
               <a:t>15</a:t>
+            </a:fld>
+            <a:endParaRPr lang="en-US"/>
+          </a:p>
+        </p:txBody>
+      </p:sp>
+    </p:spTree>
+    <p:extLst>
+      <p:ext uri="{BB962C8B-B14F-4D97-AF65-F5344CB8AC3E}">
+        <p14:creationId xmlns:p14="http://schemas.microsoft.com/office/powerpoint/2010/main" val="1024086991"/>
+      </p:ext>
+    </p:extLst>
+  </p:cSld>
+  <p:clrMapOvr>
+    <a:masterClrMapping/>
+  </p:clrMapOvr>
+</p:notes>
+</file>
+
+<file path=ppt/notesSlides/notesSlide16.xml><?xml version="1.0" encoding="utf-8"?>
+<p:notes xmlns:a="http://schemas.openxmlformats.org/drawingml/2006/main" xmlns:r="http://schemas.openxmlformats.org/officeDocument/2006/relationships" xmlns:p="http://schemas.openxmlformats.org/presentationml/2006/main">
+  <p:cSld>
+    <p:spTree>
+      <p:nvGrpSpPr>
+        <p:cNvPr id="1" name=""/>
+        <p:cNvGrpSpPr/>
+        <p:nvPr/>
+      </p:nvGrpSpPr>
+      <p:grpSpPr>
+        <a:xfrm>
+          <a:off x="0" y="0"/>
+          <a:ext cx="0" cy="0"/>
+          <a:chOff x="0" y="0"/>
+          <a:chExt cx="0" cy="0"/>
+        </a:xfrm>
+      </p:grpSpPr>
+      <p:sp>
+        <p:nvSpPr>
+          <p:cNvPr id="2" name="Slide Image Placeholder 1"/>
+          <p:cNvSpPr>
+            <a:spLocks noGrp="1" noRot="1" noChangeAspect="1"/>
+          </p:cNvSpPr>
+          <p:nvPr>
+            <p:ph type="sldImg"/>
+          </p:nvPr>
+        </p:nvSpPr>
+        <p:spPr/>
+      </p:sp>
+      <p:sp>
+        <p:nvSpPr>
+          <p:cNvPr id="3" name="Notes Placeholder 2"/>
+          <p:cNvSpPr>
+            <a:spLocks noGrp="1"/>
+          </p:cNvSpPr>
+          <p:nvPr>
+            <p:ph type="body" idx="1"/>
+          </p:nvPr>
+        </p:nvSpPr>
+        <p:spPr/>
+        <p:txBody>
+          <a:bodyPr/>
+          <a:lstStyle/>
+          <a:p>
+            <a:r>
+              <a:rPr lang="en-US" dirty="0"/>
+              <a:t>Cliffhanger: "Next week — type one quote mark and log in as admin." Remind: hashcat + wordlist ready.</a:t>
+            </a:r>
+            <a:endParaRPr lang="en-US" dirty="0"/>
+          </a:p>
+        </p:txBody>
+      </p:sp>
+      <p:sp>
+        <p:nvSpPr>
+          <p:cNvPr id="4" name="Slide Number Placeholder 3"/>
+          <p:cNvSpPr>
+            <a:spLocks noGrp="1"/>
+          </p:cNvSpPr>
+          <p:nvPr>
+            <p:ph type="sldNum" sz="quarter" idx="10"/>
+          </p:nvPr>
+        </p:nvSpPr>
+        <p:spPr/>
+        <p:txBody>
+          <a:bodyPr/>
+          <a:lstStyle/>
+          <a:p>
+            <a:fld id="{F7021451-1387-4CA6-816F-3879F97B5CBC}" type="slidenum">
+              <a:rPr lang="en-US"/>
+              <a:t>16</a:t>
             </a:fld>
             <a:endParaRPr lang="en-US"/>
           </a:p>
@@ -1572,7 +1661,7 @@
           <a:p>
             <a:r>
               <a:rPr lang="en-US" dirty="0"/>
-              <a:t>The visual that makes ECB "click". Walk the block mapping: identical plaintext → identical ciphertext, so structure leaks. Show the ECB-penguin image if you have it. This is exactly the ECB oracle they break in the lab. ~6 min.</a:t>
+              <a:t>The visual that makes ECB "click". Walk the block mapping: identical plaintext → identical ciphertext, so structure leaks. Point at the aes-modes sim (Task 1) instead of an image — it has both an ECB-penguin-style panel AND a live CBC-malleability demo (flip a ciphertext bit, watch the plaintext bit flip). Don't stop at "ECB bad, GCM good" — CBC's lack of integrity is the middle step that makes AEAD's *value* click. This is exactly the ECB oracle they break in the lab. ~6 min.</a:t>
             </a:r>
             <a:endParaRPr lang="en-US" dirty="0"/>
           </a:p>
@@ -2434,7 +2523,9 @@
           <a:ln/>
         </p:spPr>
         <p:txBody>
-          <a:bodyPr wrap="square" lIns="0" tIns="0" rIns="0" bIns="0" rtlCol="0" anchor="t"/>
+          <a:bodyPr wrap="square" lIns="0" tIns="0" rIns="0" bIns="0" rtlCol="0" anchor="t">
+            <a:normAutofit/>
+          </a:bodyPr>
           <a:lstStyle/>
           <a:p>
             <a:pPr marL="342900" indent="-342900">
@@ -2754,7 +2845,9 @@
           <a:ln/>
         </p:spPr>
         <p:txBody>
-          <a:bodyPr wrap="square" lIns="0" tIns="0" rIns="0" bIns="0" rtlCol="0" anchor="t"/>
+          <a:bodyPr wrap="square" lIns="0" tIns="0" rIns="0" bIns="0" rtlCol="0" anchor="t">
+            <a:normAutofit/>
+          </a:bodyPr>
           <a:lstStyle/>
           <a:p>
             <a:pPr marL="342900" indent="-342900">
@@ -2836,7 +2929,7 @@
                 <a:ea typeface="Calibri" pitchFamily="34" charset="-122"/>
                 <a:cs typeface="Calibri" pitchFamily="34" charset="-120"/>
               </a:rPr>
-              <a:t>CWE-321 — hardcoded key</a:t>
+              <a:t>CWE-798 — hardcoded key</a:t>
             </a:r>
             <a:endParaRPr lang="en-US" sz="1400" dirty="0"/>
           </a:p>
@@ -3036,11 +3129,11 @@
         <p:spPr>
           <a:xfrm>
             <a:off x="457200" y="1325880"/>
-            <a:ext cx="8229600" cy="1207008"/>
+            <a:ext cx="8229600" cy="1810512"/>
           </a:xfrm>
           <a:prstGeom prst="roundRect">
             <a:avLst>
-              <a:gd name="adj" fmla="val 6061"/>
+              <a:gd name="adj" fmla="val 4040"/>
             </a:avLst>
           </a:prstGeom>
           <a:solidFill>
@@ -3065,7 +3158,7 @@
         <p:spPr>
           <a:xfrm>
             <a:off x="731520" y="1435608"/>
-            <a:ext cx="7680960" cy="987552"/>
+            <a:ext cx="7680960" cy="1591056"/>
           </a:xfrm>
           <a:prstGeom prst="rect">
             <a:avLst/>
@@ -3074,7 +3167,9 @@
           <a:ln/>
         </p:spPr>
         <p:txBody>
-          <a:bodyPr wrap="square" lIns="0" tIns="0" rIns="0" bIns="0" rtlCol="0" anchor="t"/>
+          <a:bodyPr wrap="square" lIns="0" tIns="0" rIns="0" bIns="0" rtlCol="0" anchor="t">
+            <a:normAutofit/>
+          </a:bodyPr>
           <a:lstStyle/>
           <a:p>
             <a:pPr marL="342900" indent="-342900">
@@ -3135,7 +3230,7 @@
                 <a:ea typeface="Calibri" pitchFamily="34" charset="-122"/>
                 <a:cs typeface="Calibri" pitchFamily="34" charset="-120"/>
               </a:rPr>
-              <a:t>Round 3 (defend): argon2id + AES-GCM + keys from env</a:t>
+              <a:t>Round 3 (defend): run the fixed version (argon2id + AES-GCM + keys from env) and confirm it holds — then author two pieces yourself: migrate a legacy MD5 record to argon2id on next login, and write the decrypt+tamper-check the fixed version doesn't include for you</a:t>
             </a:r>
             <a:endParaRPr lang="en-US" sz="1400" dirty="0"/>
           </a:p>
@@ -3366,7 +3461,9 @@
           <a:ln/>
         </p:spPr>
         <p:txBody>
-          <a:bodyPr wrap="square" lIns="0" tIns="0" rIns="0" bIns="0" rtlCol="0" anchor="ctr"/>
+          <a:bodyPr wrap="square" lIns="0" tIns="0" rIns="0" bIns="0" rtlCol="0" anchor="ctr">
+            <a:normAutofit/>
+          </a:bodyPr>
           <a:lstStyle/>
           <a:p>
             <a:pPr indent="0" marL="0">
@@ -3396,11 +3493,11 @@
         <p:spPr>
           <a:xfrm>
             <a:off x="457200" y="2313432"/>
-            <a:ext cx="8229600" cy="1207008"/>
+            <a:ext cx="8229600" cy="1719072"/>
           </a:xfrm>
           <a:prstGeom prst="roundRect">
             <a:avLst>
-              <a:gd name="adj" fmla="val 6061"/>
+              <a:gd name="adj" fmla="val 4255"/>
             </a:avLst>
           </a:prstGeom>
           <a:solidFill>
@@ -3425,7 +3522,7 @@
         <p:spPr>
           <a:xfrm>
             <a:off x="731520" y="2423160"/>
-            <a:ext cx="7680960" cy="987552"/>
+            <a:ext cx="7680960" cy="1499616"/>
           </a:xfrm>
           <a:prstGeom prst="rect">
             <a:avLst/>
@@ -3434,7 +3531,9 @@
           <a:ln/>
         </p:spPr>
         <p:txBody>
-          <a:bodyPr wrap="square" lIns="0" tIns="0" rIns="0" bIns="0" rtlCol="0" anchor="t"/>
+          <a:bodyPr wrap="square" lIns="0" tIns="0" rIns="0" bIns="0" rtlCol="0" anchor="t">
+            <a:normAutofit/>
+          </a:bodyPr>
           <a:lstStyle/>
           <a:p>
             <a:pPr marL="342900" indent="-342900">
@@ -3474,7 +3573,7 @@
                 <a:ea typeface="Calibri" pitchFamily="34" charset="-122"/>
                 <a:cs typeface="Calibri" pitchFamily="34" charset="-120"/>
               </a:rPr>
-              <a:t>Before/after code (misuse → fix → CWE closed)</a:t>
+              <a:t>Before/after code (misuse → fix → CWE closed) — incl. your rehash-on-login migration + GCM decrypt/tamper-check</a:t>
             </a:r>
             <a:endParaRPr lang="en-US" sz="1400" dirty="0"/>
           </a:p>
@@ -3495,7 +3594,28 @@
                 <a:ea typeface="Calibri" pitchFamily="34" charset="-122"/>
                 <a:cs typeface="Calibri" pitchFamily="34" charset="-120"/>
               </a:rPr>
-              <a:t>+ Audit the AI / EiPE / Prompt Problem (see worksheet)</a:t>
+              <a:t>TLS: read a real cert's issuer/subject/validity + negotiated protocol version</a:t>
+            </a:r>
+            <a:endParaRPr lang="en-US" sz="1400" dirty="0"/>
+          </a:p>
+          <a:p>
+            <a:pPr marL="342900" indent="-342900">
+              <a:spcAft>
+                <a:spcPts val="600"/>
+              </a:spcAft>
+              <a:buSzPct val="100000"/>
+              <a:buChar char="•"/>
+            </a:pPr>
+            <a:r>
+              <a:rPr lang="en-US" sz="1400" dirty="0">
+                <a:solidFill>
+                  <a:srgbClr val="1F2937"/>
+                </a:solidFill>
+                <a:latin typeface="Calibri" pitchFamily="34" charset="0"/>
+                <a:ea typeface="Calibri" pitchFamily="34" charset="-122"/>
+                <a:cs typeface="Calibri" pitchFamily="34" charset="-120"/>
+              </a:rPr>
+              <a:t>Crack NoteVault's own MD5 hashes for the term-project report</a:t>
             </a:r>
             <a:endParaRPr lang="en-US" sz="1400" dirty="0"/>
           </a:p>
@@ -3680,7 +3800,7 @@
                 <a:ea typeface="Arial" pitchFamily="34" charset="-122"/>
                 <a:cs typeface="Arial" pitchFamily="34" charset="-120"/>
               </a:rPr>
-              <a:t>Key takeaways</a:t>
+              <a:t>Lab 3 — deliverable (cont.)</a:t>
             </a:r>
             <a:endParaRPr lang="en-US" sz="2600" dirty="0"/>
           </a:p>
@@ -3695,11 +3815,11 @@
         <p:spPr>
           <a:xfrm>
             <a:off x="457200" y="1325880"/>
-            <a:ext cx="8229600" cy="1207008"/>
+            <a:ext cx="8229600" cy="1298448"/>
           </a:xfrm>
           <a:prstGeom prst="roundRect">
             <a:avLst>
-              <a:gd name="adj" fmla="val 6061"/>
+              <a:gd name="adj" fmla="val 5634"/>
             </a:avLst>
           </a:prstGeom>
           <a:solidFill>
@@ -3724,7 +3844,7 @@
         <p:spPr>
           <a:xfrm>
             <a:off x="731520" y="1435608"/>
-            <a:ext cx="7680960" cy="987552"/>
+            <a:ext cx="7680960" cy="1078992"/>
           </a:xfrm>
           <a:prstGeom prst="rect">
             <a:avLst/>
@@ -3733,7 +3853,9 @@
           <a:ln/>
         </p:spPr>
         <p:txBody>
-          <a:bodyPr wrap="square" lIns="0" tIns="0" rIns="0" bIns="0" rtlCol="0" anchor="t"/>
+          <a:bodyPr wrap="square" lIns="0" tIns="0" rIns="0" bIns="0" rtlCol="0" anchor="t">
+            <a:normAutofit/>
+          </a:bodyPr>
           <a:lstStyle/>
           <a:p>
             <a:pPr marL="342900" indent="-342900">
@@ -3752,7 +3874,7 @@
                 <a:ea typeface="Calibri" pitchFamily="34" charset="-122"/>
                 <a:cs typeface="Calibri" pitchFamily="34" charset="-120"/>
               </a:rPr>
-              <a:t>Encoding ≠ encryption; hashing isn't reversible</a:t>
+              <a:t>Every screenshot needs your whoami + student ID + timestamp in-frame — this lab's raw output is identical for the whole cohort by design, so unstamped evidence isn't gradable</a:t>
             </a:r>
             <a:endParaRPr lang="en-US" sz="1400" dirty="0"/>
           </a:p>
@@ -3773,28 +3895,7 @@
                 <a:ea typeface="Calibri" pitchFamily="34" charset="-122"/>
                 <a:cs typeface="Calibri" pitchFamily="34" charset="-120"/>
               </a:rPr>
-              <a:t>Use vetted KDFs + authenticated encryption — never roll your own</a:t>
-            </a:r>
-            <a:endParaRPr lang="en-US" sz="1400" dirty="0"/>
-          </a:p>
-          <a:p>
-            <a:pPr marL="342900" indent="-342900">
-              <a:spcAft>
-                <a:spcPts val="600"/>
-              </a:spcAft>
-              <a:buSzPct val="100000"/>
-              <a:buChar char="•"/>
-            </a:pPr>
-            <a:r>
-              <a:rPr lang="en-US" sz="1400" dirty="0">
-                <a:solidFill>
-                  <a:srgbClr val="1F2937"/>
-                </a:solidFill>
-                <a:latin typeface="Calibri" pitchFamily="34" charset="0"/>
-                <a:ea typeface="Calibri" pitchFamily="34" charset="-122"/>
-                <a:cs typeface="Calibri" pitchFamily="34" charset="-120"/>
-              </a:rPr>
-              <a:t>Randomness &amp; key handling matter as much as the algorithm</a:t>
+              <a:t>+ Audit the AI / EiPE / Prompt Problem (see worksheet)</a:t>
             </a:r>
             <a:endParaRPr lang="en-US" sz="1400" dirty="0"/>
           </a:p>
@@ -3897,6 +3998,307 @@
       </p:grpSpPr>
       <p:sp>
         <p:nvSpPr>
+          <p:cNvPr id="2" name="Shape 0"/>
+          <p:cNvSpPr/>
+          <p:nvPr/>
+        </p:nvSpPr>
+        <p:spPr>
+          <a:xfrm>
+            <a:off x="457200" y="384048"/>
+            <a:ext cx="530352" cy="530352"/>
+          </a:xfrm>
+          <a:prstGeom prst="ellipse">
+            <a:avLst/>
+          </a:prstGeom>
+          <a:solidFill>
+            <a:srgbClr val="E35205"/>
+          </a:solidFill>
+          <a:ln/>
+          <a:effectLst>
+            <a:outerShdw sx="100000" sy="100000" kx="0" ky="0" algn="bl" rotWithShape="0" blurRad="76200" dist="25400" dir="5400000">
+              <a:srgbClr val="000000">
+                <a:alpha val="12000"/>
+              </a:srgbClr>
+            </a:outerShdw>
+          </a:effectLst>
+        </p:spPr>
+      </p:sp>
+      <p:pic>
+        <p:nvPicPr>
+          <p:cNvPr id="3" name="Image 0" descr="preencoded.png">    </p:cNvPr>
+          <p:cNvPicPr>
+            <a:picLocks noChangeAspect="1"/>
+          </p:cNvPicPr>
+          <p:nvPr/>
+        </p:nvPicPr>
+        <p:blipFill>
+          <a:blip r:embed="rId1"/>
+          <a:stretch>
+            <a:fillRect/>
+          </a:stretch>
+        </p:blipFill>
+        <p:spPr>
+          <a:xfrm>
+            <a:off x="594360" y="521208"/>
+            <a:ext cx="256032" cy="256032"/>
+          </a:xfrm>
+          <a:prstGeom prst="rect">
+            <a:avLst/>
+          </a:prstGeom>
+        </p:spPr>
+      </p:pic>
+      <p:sp>
+        <p:nvSpPr>
+          <p:cNvPr id="4" name="Text 1"/>
+          <p:cNvSpPr/>
+          <p:nvPr/>
+        </p:nvSpPr>
+        <p:spPr>
+          <a:xfrm>
+            <a:off x="1143000" y="329184"/>
+            <a:ext cx="7498080" cy="603504"/>
+          </a:xfrm>
+          <a:prstGeom prst="rect">
+            <a:avLst/>
+          </a:prstGeom>
+          <a:noFill/>
+          <a:ln/>
+        </p:spPr>
+        <p:txBody>
+          <a:bodyPr wrap="square" lIns="0" tIns="0" rIns="0" bIns="0" rtlCol="0" anchor="ctr"/>
+          <a:lstStyle/>
+          <a:p>
+            <a:pPr indent="0" marL="0">
+              <a:buNone/>
+            </a:pPr>
+            <a:r>
+              <a:rPr lang="en-US" sz="2600" b="1" dirty="0">
+                <a:solidFill>
+                  <a:srgbClr val="1F2937"/>
+                </a:solidFill>
+                <a:latin typeface="Arial" pitchFamily="34" charset="0"/>
+                <a:ea typeface="Arial" pitchFamily="34" charset="-122"/>
+                <a:cs typeface="Arial" pitchFamily="34" charset="-120"/>
+              </a:rPr>
+              <a:t>Key takeaways</a:t>
+            </a:r>
+            <a:endParaRPr lang="en-US" sz="2600" dirty="0"/>
+          </a:p>
+        </p:txBody>
+      </p:sp>
+      <p:sp>
+        <p:nvSpPr>
+          <p:cNvPr id="5" name="Shape 2"/>
+          <p:cNvSpPr/>
+          <p:nvPr/>
+        </p:nvSpPr>
+        <p:spPr>
+          <a:xfrm>
+            <a:off x="457200" y="1325880"/>
+            <a:ext cx="8229600" cy="1207008"/>
+          </a:xfrm>
+          <a:prstGeom prst="roundRect">
+            <a:avLst>
+              <a:gd name="adj" fmla="val 6061"/>
+            </a:avLst>
+          </a:prstGeom>
+          <a:solidFill>
+            <a:srgbClr val="F1F5F9"/>
+          </a:solidFill>
+          <a:ln/>
+          <a:effectLst>
+            <a:outerShdw sx="100000" sy="100000" kx="0" ky="0" algn="bl" rotWithShape="0" blurRad="76200" dist="25400" dir="5400000">
+              <a:srgbClr val="000000">
+                <a:alpha val="12000"/>
+              </a:srgbClr>
+            </a:outerShdw>
+          </a:effectLst>
+        </p:spPr>
+      </p:sp>
+      <p:sp>
+        <p:nvSpPr>
+          <p:cNvPr id="6" name="Text 3"/>
+          <p:cNvSpPr/>
+          <p:nvPr/>
+        </p:nvSpPr>
+        <p:spPr>
+          <a:xfrm>
+            <a:off x="731520" y="1435608"/>
+            <a:ext cx="7680960" cy="987552"/>
+          </a:xfrm>
+          <a:prstGeom prst="rect">
+            <a:avLst/>
+          </a:prstGeom>
+          <a:noFill/>
+          <a:ln/>
+        </p:spPr>
+        <p:txBody>
+          <a:bodyPr wrap="square" lIns="0" tIns="0" rIns="0" bIns="0" rtlCol="0" anchor="t">
+            <a:normAutofit/>
+          </a:bodyPr>
+          <a:lstStyle/>
+          <a:p>
+            <a:pPr marL="342900" indent="-342900">
+              <a:spcAft>
+                <a:spcPts val="600"/>
+              </a:spcAft>
+              <a:buSzPct val="100000"/>
+              <a:buChar char="•"/>
+            </a:pPr>
+            <a:r>
+              <a:rPr lang="en-US" sz="1400" dirty="0">
+                <a:solidFill>
+                  <a:srgbClr val="1F2937"/>
+                </a:solidFill>
+                <a:latin typeface="Calibri" pitchFamily="34" charset="0"/>
+                <a:ea typeface="Calibri" pitchFamily="34" charset="-122"/>
+                <a:cs typeface="Calibri" pitchFamily="34" charset="-120"/>
+              </a:rPr>
+              <a:t>Encoding ≠ encryption; hashing isn't reversible</a:t>
+            </a:r>
+            <a:endParaRPr lang="en-US" sz="1400" dirty="0"/>
+          </a:p>
+          <a:p>
+            <a:pPr marL="342900" indent="-342900">
+              <a:spcAft>
+                <a:spcPts val="600"/>
+              </a:spcAft>
+              <a:buSzPct val="100000"/>
+              <a:buChar char="•"/>
+            </a:pPr>
+            <a:r>
+              <a:rPr lang="en-US" sz="1400" dirty="0">
+                <a:solidFill>
+                  <a:srgbClr val="1F2937"/>
+                </a:solidFill>
+                <a:latin typeface="Calibri" pitchFamily="34" charset="0"/>
+                <a:ea typeface="Calibri" pitchFamily="34" charset="-122"/>
+                <a:cs typeface="Calibri" pitchFamily="34" charset="-120"/>
+              </a:rPr>
+              <a:t>Use vetted KDFs + authenticated encryption — never roll your own</a:t>
+            </a:r>
+            <a:endParaRPr lang="en-US" sz="1400" dirty="0"/>
+          </a:p>
+          <a:p>
+            <a:pPr marL="342900" indent="-342900">
+              <a:spcAft>
+                <a:spcPts val="600"/>
+              </a:spcAft>
+              <a:buSzPct val="100000"/>
+              <a:buChar char="•"/>
+            </a:pPr>
+            <a:r>
+              <a:rPr lang="en-US" sz="1400" dirty="0">
+                <a:solidFill>
+                  <a:srgbClr val="1F2937"/>
+                </a:solidFill>
+                <a:latin typeface="Calibri" pitchFamily="34" charset="0"/>
+                <a:ea typeface="Calibri" pitchFamily="34" charset="-122"/>
+                <a:cs typeface="Calibri" pitchFamily="34" charset="-120"/>
+              </a:rPr>
+              <a:t>Randomness &amp; key handling matter as much as the algorithm</a:t>
+            </a:r>
+            <a:endParaRPr lang="en-US" sz="1400" dirty="0"/>
+          </a:p>
+        </p:txBody>
+      </p:sp>
+      <p:sp>
+        <p:nvSpPr>
+          <p:cNvPr id="7" name="Text 4"/>
+          <p:cNvSpPr/>
+          <p:nvPr/>
+        </p:nvSpPr>
+        <p:spPr>
+          <a:xfrm>
+            <a:off x="457200" y="4800600"/>
+            <a:ext cx="6949440" cy="274320"/>
+          </a:xfrm>
+          <a:prstGeom prst="rect">
+            <a:avLst/>
+          </a:prstGeom>
+          <a:noFill/>
+          <a:ln/>
+        </p:spPr>
+        <p:txBody>
+          <a:bodyPr wrap="square" lIns="0" tIns="0" rIns="0" bIns="0" rtlCol="0" anchor="ctr"/>
+          <a:lstStyle/>
+          <a:p>
+            <a:pPr indent="0" marL="0">
+              <a:buNone/>
+            </a:pPr>
+            <a:r>
+              <a:rPr lang="en-US" sz="900" dirty="0">
+                <a:solidFill>
+                  <a:srgbClr val="64748B"/>
+                </a:solidFill>
+                <a:latin typeface="Calibri" pitchFamily="34" charset="0"/>
+                <a:ea typeface="Calibri" pitchFamily="34" charset="-122"/>
+                <a:cs typeface="Calibri" pitchFamily="34" charset="-120"/>
+              </a:rPr>
+              <a:t>Software Security · Week 3</a:t>
+            </a:r>
+            <a:endParaRPr lang="en-US" sz="900" dirty="0"/>
+          </a:p>
+        </p:txBody>
+      </p:sp>
+      <p:pic>
+        <p:nvPicPr>
+          <p:cNvPr id="8" name="Image 1" descr="/Users/pop7/Library/CloudStorage/OneDrive-MonsterConnectCo.,Ltd/Lecture/KOSEN69 - software-security/slides/pptx/assets/logo-small.png">    </p:cNvPr>
+          <p:cNvPicPr>
+            <a:picLocks noChangeAspect="1"/>
+          </p:cNvPicPr>
+          <p:nvPr/>
+        </p:nvPicPr>
+        <p:blipFill>
+          <a:blip r:embed="rId2"/>
+          <a:stretch>
+            <a:fillRect/>
+          </a:stretch>
+        </p:blipFill>
+        <p:spPr>
+          <a:xfrm>
+            <a:off x="7882128" y="4700016"/>
+            <a:ext cx="768096" cy="356616"/>
+          </a:xfrm>
+          <a:prstGeom prst="rect">
+            <a:avLst/>
+          </a:prstGeom>
+        </p:spPr>
+      </p:pic>
+    </p:spTree>
+  </p:cSld>
+  <p:clrMapOvr>
+    <a:masterClrMapping/>
+  </p:clrMapOvr>
+</p:sld>
+</file>
+
+<file path=ppt/slides/slide16.xml><?xml version="1.0" encoding="utf-8"?>
+<p:sld xmlns:a="http://schemas.openxmlformats.org/drawingml/2006/main" xmlns:r="http://schemas.openxmlformats.org/officeDocument/2006/relationships" xmlns:p="http://schemas.openxmlformats.org/presentationml/2006/main">
+  <p:cSld name="Slide 16">
+    <p:bg>
+      <p:bgPr>
+        <a:solidFill>
+          <a:srgbClr val="FFFFFF"/>
+        </a:solidFill>
+      </p:bgPr>
+    </p:bg>
+    <p:spTree>
+      <p:nvGrpSpPr>
+        <p:cNvPr id="1" name=""/>
+        <p:cNvGrpSpPr/>
+        <p:nvPr/>
+      </p:nvGrpSpPr>
+      <p:grpSpPr>
+        <a:xfrm>
+          <a:off x="0" y="0"/>
+          <a:ext cx="0" cy="0"/>
+          <a:chOff x="0" y="0"/>
+          <a:chExt cx="0" cy="0"/>
+        </a:xfrm>
+      </p:grpSpPr>
+      <p:sp>
+        <p:nvSpPr>
           <p:cNvPr id="2" name="Text 0"/>
           <p:cNvSpPr/>
           <p:nvPr/>
@@ -4166,7 +4568,9 @@
           <a:ln/>
         </p:spPr>
         <p:txBody>
-          <a:bodyPr wrap="square" lIns="0" tIns="0" rIns="0" bIns="0" rtlCol="0" anchor="t"/>
+          <a:bodyPr wrap="square" lIns="0" tIns="0" rIns="0" bIns="0" rtlCol="0" anchor="t">
+            <a:normAutofit/>
+          </a:bodyPr>
           <a:lstStyle/>
           <a:p>
             <a:pPr marL="342900" indent="-342900">
@@ -4507,7 +4911,9 @@
           <a:ln/>
         </p:spPr>
         <p:txBody>
-          <a:bodyPr wrap="square" lIns="0" tIns="0" rIns="0" bIns="0" rtlCol="0" anchor="t"/>
+          <a:bodyPr wrap="square" lIns="0" tIns="0" rIns="0" bIns="0" rtlCol="0" anchor="t">
+            <a:normAutofit/>
+          </a:bodyPr>
           <a:lstStyle/>
           <a:p>
             <a:pPr marL="342900" indent="-342900">
@@ -4785,7 +5191,9 @@
           <a:ln/>
         </p:spPr>
         <p:txBody>
-          <a:bodyPr wrap="square" lIns="0" tIns="0" rIns="0" bIns="0" rtlCol="0" anchor="t"/>
+          <a:bodyPr wrap="square" lIns="0" tIns="0" rIns="0" bIns="0" rtlCol="0" anchor="t">
+            <a:normAutofit/>
+          </a:bodyPr>
           <a:lstStyle/>
           <a:p>
             <a:pPr marL="342900" indent="-342900">
@@ -5084,7 +5492,9 @@
           <a:ln/>
         </p:spPr>
         <p:txBody>
-          <a:bodyPr wrap="square" lIns="0" tIns="0" rIns="0" bIns="0" rtlCol="0" anchor="t"/>
+          <a:bodyPr wrap="square" lIns="0" tIns="0" rIns="0" bIns="0" rtlCol="0" anchor="t">
+            <a:normAutofit/>
+          </a:bodyPr>
           <a:lstStyle/>
           <a:p>
             <a:pPr marL="342900" indent="-342900">
@@ -5345,11 +5755,11 @@
         <p:spPr>
           <a:xfrm>
             <a:off x="457200" y="1325880"/>
-            <a:ext cx="8229600" cy="1207008"/>
+            <a:ext cx="8229600" cy="1408176"/>
           </a:xfrm>
           <a:prstGeom prst="roundRect">
             <a:avLst>
-              <a:gd name="adj" fmla="val 6061"/>
+              <a:gd name="adj" fmla="val 5195"/>
             </a:avLst>
           </a:prstGeom>
           <a:solidFill>
@@ -5374,7 +5784,7 @@
         <p:spPr>
           <a:xfrm>
             <a:off x="731520" y="1435608"/>
-            <a:ext cx="7680960" cy="987552"/>
+            <a:ext cx="7680960" cy="1188720"/>
           </a:xfrm>
           <a:prstGeom prst="rect">
             <a:avLst/>
@@ -5383,7 +5793,9 @@
           <a:ln/>
         </p:spPr>
         <p:txBody>
-          <a:bodyPr wrap="square" lIns="0" tIns="0" rIns="0" bIns="0" rtlCol="0" anchor="t"/>
+          <a:bodyPr wrap="square" lIns="0" tIns="0" rIns="0" bIns="0" rtlCol="0" anchor="t">
+            <a:normAutofit/>
+          </a:bodyPr>
           <a:lstStyle/>
           <a:p>
             <a:pPr marL="342900" indent="-342900">
@@ -5423,7 +5835,7 @@
                 <a:ea typeface="Calibri" pitchFamily="34" charset="-122"/>
                 <a:cs typeface="Calibri" pitchFamily="34" charset="-120"/>
               </a:rPr>
-              <a:t>Use a slow, salted KDF: argon2id (preferred), bcrypt, scrypt</a:t>
+              <a:t>Use a slow, salted KDF, in order of preference: argon2id → scrypt (if argon2id unavailable) → bcrypt (legacy systems only) → PBKDF2 (FIPS-140 compliance only)</a:t>
             </a:r>
             <a:endParaRPr lang="en-US" sz="1400" dirty="0"/>
           </a:p>
@@ -5458,12 +5870,12 @@
         </p:nvSpPr>
         <p:spPr>
           <a:xfrm>
-            <a:off x="457200" y="2697480"/>
-            <a:ext cx="8229600" cy="786384"/>
+            <a:off x="457200" y="2898648"/>
+            <a:ext cx="8229600" cy="713232"/>
           </a:xfrm>
           <a:prstGeom prst="roundRect">
             <a:avLst>
-              <a:gd name="adj" fmla="val 6977"/>
+              <a:gd name="adj" fmla="val 7692"/>
             </a:avLst>
           </a:prstGeom>
           <a:solidFill>
@@ -5485,8 +5897,8 @@
         </p:nvSpPr>
         <p:spPr>
           <a:xfrm>
-            <a:off x="640080" y="2770632"/>
-            <a:ext cx="7863840" cy="640080"/>
+            <a:off x="640080" y="2971800"/>
+            <a:ext cx="7863840" cy="566928"/>
           </a:xfrm>
           <a:prstGeom prst="rect">
             <a:avLst/>
@@ -5495,7 +5907,9 @@
           <a:ln/>
         </p:spPr>
         <p:txBody>
-          <a:bodyPr wrap="square" lIns="0" tIns="0" rIns="0" bIns="0" rtlCol="0" anchor="t"/>
+          <a:bodyPr wrap="square" lIns="0" tIns="0" rIns="0" bIns="0" rtlCol="0" anchor="t">
+            <a:normAutofit/>
+          </a:bodyPr>
           <a:lstStyle/>
           <a:p>
             <a:pPr indent="0" marL="0">
@@ -5727,11 +6141,11 @@
         <p:spPr>
           <a:xfrm>
             <a:off x="457200" y="1325880"/>
-            <a:ext cx="8229600" cy="786384"/>
+            <a:ext cx="8229600" cy="713232"/>
           </a:xfrm>
           <a:prstGeom prst="roundRect">
             <a:avLst>
-              <a:gd name="adj" fmla="val 6977"/>
+              <a:gd name="adj" fmla="val 7692"/>
             </a:avLst>
           </a:prstGeom>
           <a:solidFill>
@@ -5754,7 +6168,7 @@
         <p:spPr>
           <a:xfrm>
             <a:off x="640080" y="1399032"/>
-            <a:ext cx="7863840" cy="640080"/>
+            <a:ext cx="7863840" cy="566928"/>
           </a:xfrm>
           <a:prstGeom prst="rect">
             <a:avLst/>
@@ -5763,7 +6177,9 @@
           <a:ln/>
         </p:spPr>
         <p:txBody>
-          <a:bodyPr wrap="square" lIns="0" tIns="0" rIns="0" bIns="0" rtlCol="0" anchor="t"/>
+          <a:bodyPr wrap="square" lIns="0" tIns="0" rIns="0" bIns="0" rtlCol="0" anchor="t">
+            <a:normAutofit/>
+          </a:bodyPr>
           <a:lstStyle/>
           <a:p>
             <a:pPr indent="0" marL="0">
@@ -5809,12 +6225,12 @@
         </p:nvSpPr>
         <p:spPr>
           <a:xfrm>
-            <a:off x="457200" y="2276856"/>
-            <a:ext cx="8229600" cy="1207008"/>
+            <a:off x="457200" y="2203704"/>
+            <a:ext cx="8229600" cy="2121408"/>
           </a:xfrm>
           <a:prstGeom prst="roundRect">
             <a:avLst>
-              <a:gd name="adj" fmla="val 6061"/>
+              <a:gd name="adj" fmla="val 3448"/>
             </a:avLst>
           </a:prstGeom>
           <a:solidFill>
@@ -5838,8 +6254,8 @@
         </p:nvSpPr>
         <p:spPr>
           <a:xfrm>
-            <a:off x="731520" y="2386584"/>
-            <a:ext cx="7680960" cy="987552"/>
+            <a:off x="731520" y="2313432"/>
+            <a:ext cx="7680960" cy="1901952"/>
           </a:xfrm>
           <a:prstGeom prst="rect">
             <a:avLst/>
@@ -5848,7 +6264,9 @@
           <a:ln/>
         </p:spPr>
         <p:txBody>
-          <a:bodyPr wrap="square" lIns="0" tIns="0" rIns="0" bIns="0" rtlCol="0" anchor="t"/>
+          <a:bodyPr wrap="square" lIns="0" tIns="0" rIns="0" bIns="0" rtlCol="0" anchor="t">
+            <a:normAutofit/>
+          </a:bodyPr>
           <a:lstStyle/>
           <a:p>
             <a:pPr marL="342900" indent="-342900">
@@ -5909,7 +6327,28 @@
                 <a:ea typeface="Calibri" pitchFamily="34" charset="-122"/>
                 <a:cs typeface="Calibri" pitchFamily="34" charset="-120"/>
               </a:rPr>
-              <a:t>Fix: an authenticated mode (AES-GCM) with a random nonce</a:t>
+              <a:t>CBC isn't the fix either — no integrity check means an attacker can flip bits in the ciphertext and the corresponding plaintext bits flip predictably (try it in the aes-modes sim: flip a bit in a sess=...;admin=0;... token)</a:t>
+            </a:r>
+            <a:endParaRPr lang="en-US" sz="1400" dirty="0"/>
+          </a:p>
+          <a:p>
+            <a:pPr marL="342900" indent="-342900">
+              <a:spcAft>
+                <a:spcPts val="600"/>
+              </a:spcAft>
+              <a:buSzPct val="100000"/>
+              <a:buChar char="•"/>
+            </a:pPr>
+            <a:r>
+              <a:rPr lang="en-US" sz="1400" dirty="0">
+                <a:solidFill>
+                  <a:srgbClr val="1F2937"/>
+                </a:solidFill>
+                <a:latin typeface="Calibri" pitchFamily="34" charset="0"/>
+                <a:ea typeface="Calibri" pitchFamily="34" charset="-122"/>
+                <a:cs typeface="Calibri" pitchFamily="34" charset="-120"/>
+              </a:rPr>
+              <a:t>Fix: an authenticated mode (AES-GCM) with a random nonce — confidentiality and integrity together</a:t>
             </a:r>
             <a:endParaRPr lang="en-US" sz="1400" dirty="0"/>
           </a:p>
@@ -6109,11 +6548,11 @@
         <p:spPr>
           <a:xfrm>
             <a:off x="457200" y="1325880"/>
-            <a:ext cx="8229600" cy="786384"/>
+            <a:ext cx="8229600" cy="713232"/>
           </a:xfrm>
           <a:prstGeom prst="roundRect">
             <a:avLst>
-              <a:gd name="adj" fmla="val 6977"/>
+              <a:gd name="adj" fmla="val 7692"/>
             </a:avLst>
           </a:prstGeom>
           <a:solidFill>
@@ -6136,7 +6575,7 @@
         <p:spPr>
           <a:xfrm>
             <a:off x="640080" y="1399032"/>
-            <a:ext cx="7863840" cy="640080"/>
+            <a:ext cx="7863840" cy="566928"/>
           </a:xfrm>
           <a:prstGeom prst="rect">
             <a:avLst/>
@@ -6145,7 +6584,9 @@
           <a:ln/>
         </p:spPr>
         <p:txBody>
-          <a:bodyPr wrap="square" lIns="0" tIns="0" rIns="0" bIns="0" rtlCol="0" anchor="t"/>
+          <a:bodyPr wrap="square" lIns="0" tIns="0" rIns="0" bIns="0" rtlCol="0" anchor="t">
+            <a:normAutofit/>
+          </a:bodyPr>
           <a:lstStyle/>
           <a:p>
             <a:pPr indent="0" marL="0">
@@ -6191,7 +6632,7 @@
         </p:nvSpPr>
         <p:spPr>
           <a:xfrm>
-            <a:off x="457200" y="2276856"/>
+            <a:off x="457200" y="2203704"/>
             <a:ext cx="8229600" cy="896112"/>
           </a:xfrm>
           <a:prstGeom prst="roundRect">
@@ -6220,7 +6661,7 @@
         </p:nvSpPr>
         <p:spPr>
           <a:xfrm>
-            <a:off x="731520" y="2386584"/>
+            <a:off x="731520" y="2313432"/>
             <a:ext cx="7680960" cy="676656"/>
           </a:xfrm>
           <a:prstGeom prst="rect">
@@ -6230,7 +6671,9 @@
           <a:ln/>
         </p:spPr>
         <p:txBody>
-          <a:bodyPr wrap="square" lIns="0" tIns="0" rIns="0" bIns="0" rtlCol="0" anchor="t"/>
+          <a:bodyPr wrap="square" lIns="0" tIns="0" rIns="0" bIns="0" rtlCol="0" anchor="t">
+            <a:normAutofit/>
+          </a:bodyPr>
           <a:lstStyle/>
           <a:p>
             <a:pPr marL="342900" indent="-342900">
@@ -6508,7 +6951,9 @@
           <a:ln/>
         </p:spPr>
         <p:txBody>
-          <a:bodyPr wrap="square" lIns="0" tIns="0" rIns="0" bIns="0" rtlCol="0" anchor="t"/>
+          <a:bodyPr wrap="square" lIns="0" tIns="0" rIns="0" bIns="0" rtlCol="0" anchor="t">
+            <a:normAutofit/>
+          </a:bodyPr>
           <a:lstStyle/>
           <a:p>
             <a:pPr marL="342900" indent="-342900">

--- a/slides/pptx/week03.pptx
+++ b/slides/pptx/week03.pptx
@@ -21,9 +21,10 @@
     <p:sldId id="269" r:id="rId15"/>
     <p:sldId id="270" r:id="rId16"/>
     <p:sldId id="271" r:id="rId17"/>
+    <p:sldId id="272" r:id="rId18"/>
   </p:sldIdLst>
   <p:notesMasterIdLst>
-    <p:notesMasterId r:id="rId18"/>
+    <p:notesMasterId r:id="rId19"/>
   </p:notesMasterIdLst>
   <p:sldSz cx="9144000" cy="5143500"/>
   <p:notesSz cx="5143500" cy="9144000"/>
@@ -781,7 +782,7 @@
           <a:p>
             <a:r>
               <a:rPr lang="en-US" dirty="0"/>
-              <a:t>Explain rounds before lab. Round 1 = instant-feedback fun. Round 3 is NOT just "run the pre-fixed code and verify" — be precise that the rehash-on-login migration and the GCM decrypt/tamper-check are the parts students actually write; the rest of the fixed script is handed to them already implemented. Leaderboard on round 1. ~3 min.</a:t>
+              <a:t>Synthesis slide — the four separate concepts from the last several slides (KDF, cipher mode, RNG, key source) are one decision each in vulnerable_crypto.py, not one big "use better crypto" fix. Land on the closing line: picking AES-GCM doesn't save you if the key is still hardcoded. ~4 min.</a:t>
             </a:r>
             <a:endParaRPr lang="en-US" dirty="0"/>
           </a:p>
@@ -869,7 +870,7 @@
           <a:p>
             <a:r>
               <a:rPr lang="en-US" dirty="0"/>
-              <a:t>Graded output — six pieces, not three; don't let the deliverable slide undersell TLS (Task 8) or the evidence stamp (highest-impact single miss if skipped — output is byte-identical across the cohort without it). Point to vulnerable_crypto.py + solution_skeleton.py.</a:t>
+              <a:t>Explain rounds before lab. Round 1 = instant-feedback fun. Round 3 is NOT just "run the pre-fixed code and verify" — be precise that the rehash-on-login migration and the GCM decrypt/tamper-check are the parts students actually write; the rest of the fixed script is handed to them already implemented. Leaderboard on round 1. ~3 min.</a:t>
             </a:r>
             <a:endParaRPr lang="en-US" dirty="0"/>
           </a:p>
@@ -1045,7 +1046,7 @@
           <a:p>
             <a:r>
               <a:rPr lang="en-US" dirty="0"/>
-              <a:t>Recap. Cold-call: "how should we store passwords, and why salted+slow?" ~2 min.</a:t>
+              <a:t>Graded output — six pieces, not three; don't let the deliverable slide undersell TLS (Task 8) or the evidence stamp (highest-impact single miss if skipped — output is byte-identical across the cohort without it). Point to vulnerable_crypto.py + solution_skeleton.py.</a:t>
             </a:r>
             <a:endParaRPr lang="en-US" dirty="0"/>
           </a:p>
@@ -1133,7 +1134,7 @@
           <a:p>
             <a:r>
               <a:rPr lang="en-US" dirty="0"/>
-              <a:t>Cliffhanger: "Next week — type one quote mark and log in as admin." Remind: hashcat + wordlist ready.</a:t>
+              <a:t>Recap. Cold-call: "how should we store passwords, and why salted+slow?" ~2 min.</a:t>
             </a:r>
             <a:endParaRPr lang="en-US" dirty="0"/>
           </a:p>
@@ -1157,6 +1158,94 @@
             <a:fld id="{F7021451-1387-4CA6-816F-3879F97B5CBC}" type="slidenum">
               <a:rPr lang="en-US"/>
               <a:t>16</a:t>
+            </a:fld>
+            <a:endParaRPr lang="en-US"/>
+          </a:p>
+        </p:txBody>
+      </p:sp>
+    </p:spTree>
+    <p:extLst>
+      <p:ext uri="{BB962C8B-B14F-4D97-AF65-F5344CB8AC3E}">
+        <p14:creationId xmlns:p14="http://schemas.microsoft.com/office/powerpoint/2010/main" val="1024086991"/>
+      </p:ext>
+    </p:extLst>
+  </p:cSld>
+  <p:clrMapOvr>
+    <a:masterClrMapping/>
+  </p:clrMapOvr>
+</p:notes>
+</file>
+
+<file path=ppt/notesSlides/notesSlide17.xml><?xml version="1.0" encoding="utf-8"?>
+<p:notes xmlns:a="http://schemas.openxmlformats.org/drawingml/2006/main" xmlns:r="http://schemas.openxmlformats.org/officeDocument/2006/relationships" xmlns:p="http://schemas.openxmlformats.org/presentationml/2006/main">
+  <p:cSld>
+    <p:spTree>
+      <p:nvGrpSpPr>
+        <p:cNvPr id="1" name=""/>
+        <p:cNvGrpSpPr/>
+        <p:nvPr/>
+      </p:nvGrpSpPr>
+      <p:grpSpPr>
+        <a:xfrm>
+          <a:off x="0" y="0"/>
+          <a:ext cx="0" cy="0"/>
+          <a:chOff x="0" y="0"/>
+          <a:chExt cx="0" cy="0"/>
+        </a:xfrm>
+      </p:grpSpPr>
+      <p:sp>
+        <p:nvSpPr>
+          <p:cNvPr id="2" name="Slide Image Placeholder 1"/>
+          <p:cNvSpPr>
+            <a:spLocks noGrp="1" noRot="1" noChangeAspect="1"/>
+          </p:cNvSpPr>
+          <p:nvPr>
+            <p:ph type="sldImg"/>
+          </p:nvPr>
+        </p:nvSpPr>
+        <p:spPr/>
+      </p:sp>
+      <p:sp>
+        <p:nvSpPr>
+          <p:cNvPr id="3" name="Notes Placeholder 2"/>
+          <p:cNvSpPr>
+            <a:spLocks noGrp="1"/>
+          </p:cNvSpPr>
+          <p:nvPr>
+            <p:ph type="body" idx="1"/>
+          </p:nvPr>
+        </p:nvSpPr>
+        <p:spPr/>
+        <p:txBody>
+          <a:bodyPr/>
+          <a:lstStyle/>
+          <a:p>
+            <a:r>
+              <a:rPr lang="en-US" dirty="0"/>
+              <a:t>Cliffhanger: "Next week — type one quote mark and log in as admin." Remind: hashcat + wordlist ready.</a:t>
+            </a:r>
+            <a:endParaRPr lang="en-US" dirty="0"/>
+          </a:p>
+        </p:txBody>
+      </p:sp>
+      <p:sp>
+        <p:nvSpPr>
+          <p:cNvPr id="4" name="Slide Number Placeholder 3"/>
+          <p:cNvSpPr>
+            <a:spLocks noGrp="1"/>
+          </p:cNvSpPr>
+          <p:nvPr>
+            <p:ph type="sldNum" sz="quarter" idx="10"/>
+          </p:nvPr>
+        </p:nvSpPr>
+        <p:spPr/>
+        <p:txBody>
+          <a:bodyPr/>
+          <a:lstStyle/>
+          <a:p>
+            <a:fld id="{F7021451-1387-4CA6-816F-3879F97B5CBC}" type="slidenum">
+              <a:rPr lang="en-US"/>
+              <a:t>17</a:t>
             </a:fld>
             <a:endParaRPr lang="en-US"/>
           </a:p>
@@ -1661,7 +1750,7 @@
           <a:p>
             <a:r>
               <a:rPr lang="en-US" dirty="0"/>
-              <a:t>The visual that makes ECB "click". Walk the block mapping: identical plaintext → identical ciphertext, so structure leaks. Point at the aes-modes sim (Task 1) instead of an image — it has both an ECB-penguin-style panel AND a live CBC-malleability demo (flip a ciphertext bit, watch the plaintext bit flip). Don't stop at "ECB bad, GCM good" — CBC's lack of integrity is the middle step that makes AEAD's *value* click. This is exactly the ECB oracle they break in the lab. ~6 min.</a:t>
+              <a:t>The visual that makes ECB "click" — an ECB-penguin-style panel AND a live CBC-malleability demo (flip a ciphertext bit, watch the plaintext bit flip in a sess=...;admin=0;... token) in one sim. Don't stop at "ECB bad, GCM good" — CBC's lack of integrity is the middle step that makes AEAD's *value* click. This is exactly the ECB oracle they break in the lab. ~6 min.</a:t>
             </a:r>
             <a:endParaRPr lang="en-US" dirty="0"/>
           </a:p>
@@ -3114,7 +3203,7 @@
                 <a:ea typeface="Arial" pitchFamily="34" charset="-122"/>
                 <a:cs typeface="Arial" pitchFamily="34" charset="-120"/>
               </a:rPr>
-              <a:t>🔓 Game — Capture the Hash</a:t>
+              <a:t>Four decisions, four fixes</a:t>
             </a:r>
             <a:endParaRPr lang="en-US" sz="2600" dirty="0"/>
           </a:p>
@@ -3122,43 +3211,14 @@
       </p:sp>
       <p:sp>
         <p:nvSpPr>
-          <p:cNvPr id="5" name="Shape 2"/>
-          <p:cNvSpPr/>
-          <p:nvPr/>
-        </p:nvSpPr>
-        <p:spPr>
-          <a:xfrm>
-            <a:off x="457200" y="1325880"/>
-            <a:ext cx="8229600" cy="1810512"/>
-          </a:xfrm>
-          <a:prstGeom prst="roundRect">
-            <a:avLst>
-              <a:gd name="adj" fmla="val 4040"/>
-            </a:avLst>
-          </a:prstGeom>
-          <a:solidFill>
-            <a:srgbClr val="F1F5F9"/>
-          </a:solidFill>
-          <a:ln/>
-          <a:effectLst>
-            <a:outerShdw sx="100000" sy="100000" kx="0" ky="0" algn="bl" rotWithShape="0" blurRad="76200" dist="25400" dir="5400000">
-              <a:srgbClr val="000000">
-                <a:alpha val="12000"/>
-              </a:srgbClr>
-            </a:outerShdw>
-          </a:effectLst>
-        </p:spPr>
-      </p:sp>
-      <p:sp>
-        <p:nvSpPr>
-          <p:cNvPr id="6" name="Text 3"/>
-          <p:cNvSpPr/>
-          <p:nvPr/>
-        </p:nvSpPr>
-        <p:spPr>
-          <a:xfrm>
-            <a:off x="731520" y="1435608"/>
-            <a:ext cx="7680960" cy="1591056"/>
+          <p:cNvPr id="5" name="Text 2"/>
+          <p:cNvSpPr/>
+          <p:nvPr/>
+        </p:nvSpPr>
+        <p:spPr>
+          <a:xfrm>
+            <a:off x="548640" y="1325880"/>
+            <a:ext cx="8046720" cy="1645920"/>
           </a:xfrm>
           <a:prstGeom prst="rect">
             <a:avLst/>
@@ -3172,12 +3232,8 @@
           </a:bodyPr>
           <a:lstStyle/>
           <a:p>
-            <a:pPr marL="342900" indent="-342900">
-              <a:spcAft>
-                <a:spcPts val="600"/>
-              </a:spcAft>
-              <a:buSzPct val="100000"/>
-              <a:buChar char="•"/>
+            <a:pPr indent="0" marL="0">
+              <a:buNone/>
             </a:pPr>
             <a:r>
               <a:rPr lang="en-US" sz="1400" dirty="0">
@@ -3188,87 +3244,45 @@
                 <a:ea typeface="Calibri" pitchFamily="34" charset="-122"/>
                 <a:cs typeface="Calibri" pitchFamily="34" charset="-120"/>
               </a:rPr>
-              <a:t>Round 1 (speedrun): crack unsalted/MD5 hashes — fastest team wins</a:t>
+              <a:t>See diagram: Four crypto misuses and their fixes: password storage (md5 to argon2id), cipher mode (hardcoded-key ECB to GCM with a nonce and auth tag), randomness (random.choice to secrets.token_urlsafe), and key source (hardcoded key to an environment variable). One cipher name answers none of these four questions — AES-GCM under a hardcoded key is still CWE-798. (web only)</a:t>
             </a:r>
             <a:endParaRPr lang="en-US" sz="1400" dirty="0"/>
           </a:p>
-          <a:p>
-            <a:pPr marL="342900" indent="-342900">
-              <a:spcAft>
-                <a:spcPts val="600"/>
-              </a:spcAft>
-              <a:buSzPct val="100000"/>
-              <a:buChar char="•"/>
-            </a:pPr>
-            <a:r>
-              <a:rPr lang="en-US" sz="1400" dirty="0">
-                <a:solidFill>
-                  <a:srgbClr val="1F2937"/>
+        </p:txBody>
+      </p:sp>
+      <p:sp>
+        <p:nvSpPr>
+          <p:cNvPr id="6" name="Text 3"/>
+          <p:cNvSpPr/>
+          <p:nvPr/>
+        </p:nvSpPr>
+        <p:spPr>
+          <a:xfrm>
+            <a:off x="457200" y="4800600"/>
+            <a:ext cx="6949440" cy="274320"/>
+          </a:xfrm>
+          <a:prstGeom prst="rect">
+            <a:avLst/>
+          </a:prstGeom>
+          <a:noFill/>
+          <a:ln/>
+        </p:spPr>
+        <p:txBody>
+          <a:bodyPr wrap="square" lIns="0" tIns="0" rIns="0" bIns="0" rtlCol="0" anchor="ctr"/>
+          <a:lstStyle/>
+          <a:p>
+            <a:pPr indent="0" marL="0">
+              <a:buNone/>
+            </a:pPr>
+            <a:r>
+              <a:rPr lang="en-US" sz="900" dirty="0">
+                <a:solidFill>
+                  <a:srgbClr val="64748B"/>
                 </a:solidFill>
                 <a:latin typeface="Calibri" pitchFamily="34" charset="0"/>
                 <a:ea typeface="Calibri" pitchFamily="34" charset="-122"/>
                 <a:cs typeface="Calibri" pitchFamily="34" charset="-120"/>
               </a:rPr>
-              <a:t>Round 2: exploit an ECB oracle (identical blocks)</a:t>
-            </a:r>
-            <a:endParaRPr lang="en-US" sz="1400" dirty="0"/>
-          </a:p>
-          <a:p>
-            <a:pPr marL="342900" indent="-342900">
-              <a:spcAft>
-                <a:spcPts val="600"/>
-              </a:spcAft>
-              <a:buSzPct val="100000"/>
-              <a:buChar char="•"/>
-            </a:pPr>
-            <a:r>
-              <a:rPr lang="en-US" sz="1400" dirty="0">
-                <a:solidFill>
-                  <a:srgbClr val="1F2937"/>
-                </a:solidFill>
-                <a:latin typeface="Calibri" pitchFamily="34" charset="0"/>
-                <a:ea typeface="Calibri" pitchFamily="34" charset="-122"/>
-                <a:cs typeface="Calibri" pitchFamily="34" charset="-120"/>
-              </a:rPr>
-              <a:t>Round 3 (defend): run the fixed version (argon2id + AES-GCM + keys from env) and confirm it holds — then author two pieces yourself: migrate a legacy MD5 record to argon2id on next login, and write the decrypt+tamper-check the fixed version doesn't include for you</a:t>
-            </a:r>
-            <a:endParaRPr lang="en-US" sz="1400" dirty="0"/>
-          </a:p>
-        </p:txBody>
-      </p:sp>
-      <p:sp>
-        <p:nvSpPr>
-          <p:cNvPr id="7" name="Text 4"/>
-          <p:cNvSpPr/>
-          <p:nvPr/>
-        </p:nvSpPr>
-        <p:spPr>
-          <a:xfrm>
-            <a:off x="457200" y="4800600"/>
-            <a:ext cx="6949440" cy="274320"/>
-          </a:xfrm>
-          <a:prstGeom prst="rect">
-            <a:avLst/>
-          </a:prstGeom>
-          <a:noFill/>
-          <a:ln/>
-        </p:spPr>
-        <p:txBody>
-          <a:bodyPr wrap="square" lIns="0" tIns="0" rIns="0" bIns="0" rtlCol="0" anchor="ctr"/>
-          <a:lstStyle/>
-          <a:p>
-            <a:pPr indent="0" marL="0">
-              <a:buNone/>
-            </a:pPr>
-            <a:r>
-              <a:rPr lang="en-US" sz="900" dirty="0">
-                <a:solidFill>
-                  <a:srgbClr val="64748B"/>
-                </a:solidFill>
-                <a:latin typeface="Calibri" pitchFamily="34" charset="0"/>
-                <a:ea typeface="Calibri" pitchFamily="34" charset="-122"/>
-                <a:cs typeface="Calibri" pitchFamily="34" charset="-120"/>
-              </a:rPr>
               <a:t>Software Security · Week 3</a:t>
             </a:r>
             <a:endParaRPr lang="en-US" sz="900" dirty="0"/>
@@ -3277,7 +3291,7 @@
       </p:sp>
       <p:pic>
         <p:nvPicPr>
-          <p:cNvPr id="8" name="Image 1" descr="/Users/pop7/Library/CloudStorage/OneDrive-MonsterConnectCo.,Ltd/Lecture/KOSEN69 - software-security/slides/pptx/assets/logo-small.png">    </p:cNvPr>
+          <p:cNvPr id="7" name="Image 1" descr="/Users/pop7/Library/CloudStorage/OneDrive-MonsterConnectCo.,Ltd/Lecture/KOSEN69 - software-security/slides/pptx/assets/logo-small.png">    </p:cNvPr>
           <p:cNvPicPr>
             <a:picLocks noChangeAspect="1"/>
           </p:cNvPicPr>
@@ -3415,7 +3429,7 @@
                 <a:ea typeface="Arial" pitchFamily="34" charset="-122"/>
                 <a:cs typeface="Arial" pitchFamily="34" charset="-120"/>
               </a:rPr>
-              <a:t>Lab 3 — deliverable</a:t>
+              <a:t>🔓 Game — Capture the Hash</a:t>
             </a:r>
             <a:endParaRPr lang="en-US" sz="2600" dirty="0"/>
           </a:p>
@@ -3430,74 +3444,11 @@
         <p:spPr>
           <a:xfrm>
             <a:off x="457200" y="1325880"/>
-            <a:ext cx="8229600" cy="822960"/>
+            <a:ext cx="8229600" cy="1810512"/>
           </a:xfrm>
           <a:prstGeom prst="roundRect">
             <a:avLst>
-              <a:gd name="adj" fmla="val 8889"/>
-            </a:avLst>
-          </a:prstGeom>
-          <a:solidFill>
-            <a:srgbClr val="E8EDF3"/>
-          </a:solidFill>
-          <a:ln/>
-        </p:spPr>
-      </p:sp>
-      <p:sp>
-        <p:nvSpPr>
-          <p:cNvPr id="6" name="Text 3"/>
-          <p:cNvSpPr/>
-          <p:nvPr/>
-        </p:nvSpPr>
-        <p:spPr>
-          <a:xfrm>
-            <a:off x="731520" y="1325880"/>
-            <a:ext cx="7680960" cy="822960"/>
-          </a:xfrm>
-          <a:prstGeom prst="rect">
-            <a:avLst/>
-          </a:prstGeom>
-          <a:noFill/>
-          <a:ln/>
-        </p:spPr>
-        <p:txBody>
-          <a:bodyPr wrap="square" lIns="0" tIns="0" rIns="0" bIns="0" rtlCol="0" anchor="ctr">
-            <a:normAutofit/>
-          </a:bodyPr>
-          <a:lstStyle/>
-          <a:p>
-            <a:pPr indent="0" marL="0">
-              <a:buNone/>
-            </a:pPr>
-            <a:r>
-              <a:rPr lang="en-US" sz="1400" i="1" dirty="0">
-                <a:solidFill>
-                  <a:srgbClr val="E35205"/>
-                </a:solidFill>
-                <a:latin typeface="Calibri" pitchFamily="34" charset="0"/>
-                <a:ea typeface="Calibri" pitchFamily="34" charset="-122"/>
-                <a:cs typeface="Calibri" pitchFamily="34" charset="-120"/>
-              </a:rPr>
-              <a:t>📋 Worksheet 3 — labs/week03-cryptography/worksheet.md (Part 3) · kickoff: docker compose up (runs the crypto scripts)</a:t>
-            </a:r>
-            <a:endParaRPr lang="en-US" sz="1400" dirty="0"/>
-          </a:p>
-        </p:txBody>
-      </p:sp>
-      <p:sp>
-        <p:nvSpPr>
-          <p:cNvPr id="7" name="Shape 4"/>
-          <p:cNvSpPr/>
-          <p:nvPr/>
-        </p:nvSpPr>
-        <p:spPr>
-          <a:xfrm>
-            <a:off x="457200" y="2313432"/>
-            <a:ext cx="8229600" cy="1719072"/>
-          </a:xfrm>
-          <a:prstGeom prst="roundRect">
-            <a:avLst>
-              <a:gd name="adj" fmla="val 4255"/>
+              <a:gd name="adj" fmla="val 4040"/>
             </a:avLst>
           </a:prstGeom>
           <a:solidFill>
@@ -3515,14 +3466,14 @@
       </p:sp>
       <p:sp>
         <p:nvSpPr>
-          <p:cNvPr id="8" name="Text 5"/>
-          <p:cNvSpPr/>
-          <p:nvPr/>
-        </p:nvSpPr>
-        <p:spPr>
-          <a:xfrm>
-            <a:off x="731520" y="2423160"/>
-            <a:ext cx="7680960" cy="1499616"/>
+          <p:cNvPr id="6" name="Text 3"/>
+          <p:cNvSpPr/>
+          <p:nvPr/>
+        </p:nvSpPr>
+        <p:spPr>
+          <a:xfrm>
+            <a:off x="731520" y="1435608"/>
+            <a:ext cx="7680960" cy="1591056"/>
           </a:xfrm>
           <a:prstGeom prst="rect">
             <a:avLst/>
@@ -3552,7 +3503,7 @@
                 <a:ea typeface="Calibri" pitchFamily="34" charset="-122"/>
                 <a:cs typeface="Calibri" pitchFamily="34" charset="-120"/>
               </a:rPr>
-              <a:t>Cracked hashes + method · ECB-leak proof · predictable-token note</a:t>
+              <a:t>Round 1 (speedrun): crack unsalted/MD5 hashes — fastest team wins</a:t>
             </a:r>
             <a:endParaRPr lang="en-US" sz="1400" dirty="0"/>
           </a:p>
@@ -3573,7 +3524,7 @@
                 <a:ea typeface="Calibri" pitchFamily="34" charset="-122"/>
                 <a:cs typeface="Calibri" pitchFamily="34" charset="-120"/>
               </a:rPr>
-              <a:t>Before/after code (misuse → fix → CWE closed) — incl. your rehash-on-login migration + GCM decrypt/tamper-check</a:t>
+              <a:t>Round 2: exploit an ECB oracle (identical blocks)</a:t>
             </a:r>
             <a:endParaRPr lang="en-US" sz="1400" dirty="0"/>
           </a:p>
@@ -3594,66 +3545,45 @@
                 <a:ea typeface="Calibri" pitchFamily="34" charset="-122"/>
                 <a:cs typeface="Calibri" pitchFamily="34" charset="-120"/>
               </a:rPr>
-              <a:t>TLS: read a real cert's issuer/subject/validity + negotiated protocol version</a:t>
+              <a:t>Round 3 (defend): run the fixed version (argon2id + AES-GCM + keys from env) and confirm it holds — then author two pieces yourself: migrate a legacy MD5 record to argon2id on next login, and write the decrypt+tamper-check the fixed version doesn't include for you</a:t>
             </a:r>
             <a:endParaRPr lang="en-US" sz="1400" dirty="0"/>
           </a:p>
-          <a:p>
-            <a:pPr marL="342900" indent="-342900">
-              <a:spcAft>
-                <a:spcPts val="600"/>
-              </a:spcAft>
-              <a:buSzPct val="100000"/>
-              <a:buChar char="•"/>
-            </a:pPr>
-            <a:r>
-              <a:rPr lang="en-US" sz="1400" dirty="0">
-                <a:solidFill>
-                  <a:srgbClr val="1F2937"/>
+        </p:txBody>
+      </p:sp>
+      <p:sp>
+        <p:nvSpPr>
+          <p:cNvPr id="7" name="Text 4"/>
+          <p:cNvSpPr/>
+          <p:nvPr/>
+        </p:nvSpPr>
+        <p:spPr>
+          <a:xfrm>
+            <a:off x="457200" y="4800600"/>
+            <a:ext cx="6949440" cy="274320"/>
+          </a:xfrm>
+          <a:prstGeom prst="rect">
+            <a:avLst/>
+          </a:prstGeom>
+          <a:noFill/>
+          <a:ln/>
+        </p:spPr>
+        <p:txBody>
+          <a:bodyPr wrap="square" lIns="0" tIns="0" rIns="0" bIns="0" rtlCol="0" anchor="ctr"/>
+          <a:lstStyle/>
+          <a:p>
+            <a:pPr indent="0" marL="0">
+              <a:buNone/>
+            </a:pPr>
+            <a:r>
+              <a:rPr lang="en-US" sz="900" dirty="0">
+                <a:solidFill>
+                  <a:srgbClr val="64748B"/>
                 </a:solidFill>
                 <a:latin typeface="Calibri" pitchFamily="34" charset="0"/>
                 <a:ea typeface="Calibri" pitchFamily="34" charset="-122"/>
                 <a:cs typeface="Calibri" pitchFamily="34" charset="-120"/>
               </a:rPr>
-              <a:t>Crack NoteVault's own MD5 hashes for the term-project report</a:t>
-            </a:r>
-            <a:endParaRPr lang="en-US" sz="1400" dirty="0"/>
-          </a:p>
-        </p:txBody>
-      </p:sp>
-      <p:sp>
-        <p:nvSpPr>
-          <p:cNvPr id="9" name="Text 6"/>
-          <p:cNvSpPr/>
-          <p:nvPr/>
-        </p:nvSpPr>
-        <p:spPr>
-          <a:xfrm>
-            <a:off x="457200" y="4800600"/>
-            <a:ext cx="6949440" cy="274320"/>
-          </a:xfrm>
-          <a:prstGeom prst="rect">
-            <a:avLst/>
-          </a:prstGeom>
-          <a:noFill/>
-          <a:ln/>
-        </p:spPr>
-        <p:txBody>
-          <a:bodyPr wrap="square" lIns="0" tIns="0" rIns="0" bIns="0" rtlCol="0" anchor="ctr"/>
-          <a:lstStyle/>
-          <a:p>
-            <a:pPr indent="0" marL="0">
-              <a:buNone/>
-            </a:pPr>
-            <a:r>
-              <a:rPr lang="en-US" sz="900" dirty="0">
-                <a:solidFill>
-                  <a:srgbClr val="64748B"/>
-                </a:solidFill>
-                <a:latin typeface="Calibri" pitchFamily="34" charset="0"/>
-                <a:ea typeface="Calibri" pitchFamily="34" charset="-122"/>
-                <a:cs typeface="Calibri" pitchFamily="34" charset="-120"/>
-              </a:rPr>
               <a:t>Software Security · Week 3</a:t>
             </a:r>
             <a:endParaRPr lang="en-US" sz="900" dirty="0"/>
@@ -3662,7 +3592,7 @@
       </p:sp>
       <p:pic>
         <p:nvPicPr>
-          <p:cNvPr id="10" name="Image 1" descr="/Users/pop7/Library/CloudStorage/OneDrive-MonsterConnectCo.,Ltd/Lecture/KOSEN69 - software-security/slides/pptx/assets/logo-small.png">    </p:cNvPr>
+          <p:cNvPr id="8" name="Image 1" descr="/Users/pop7/Library/CloudStorage/OneDrive-MonsterConnectCo.,Ltd/Lecture/KOSEN69 - software-security/slides/pptx/assets/logo-small.png">    </p:cNvPr>
           <p:cNvPicPr>
             <a:picLocks noChangeAspect="1"/>
           </p:cNvPicPr>
@@ -3800,7 +3730,7 @@
                 <a:ea typeface="Arial" pitchFamily="34" charset="-122"/>
                 <a:cs typeface="Arial" pitchFamily="34" charset="-120"/>
               </a:rPr>
-              <a:t>Lab 3 — deliverable (cont.)</a:t>
+              <a:t>Lab 3 — deliverable</a:t>
             </a:r>
             <a:endParaRPr lang="en-US" sz="2600" dirty="0"/>
           </a:p>
@@ -3815,11 +3745,74 @@
         <p:spPr>
           <a:xfrm>
             <a:off x="457200" y="1325880"/>
-            <a:ext cx="8229600" cy="1298448"/>
+            <a:ext cx="8229600" cy="822960"/>
           </a:xfrm>
           <a:prstGeom prst="roundRect">
             <a:avLst>
-              <a:gd name="adj" fmla="val 5634"/>
+              <a:gd name="adj" fmla="val 8889"/>
+            </a:avLst>
+          </a:prstGeom>
+          <a:solidFill>
+            <a:srgbClr val="E8EDF3"/>
+          </a:solidFill>
+          <a:ln/>
+        </p:spPr>
+      </p:sp>
+      <p:sp>
+        <p:nvSpPr>
+          <p:cNvPr id="6" name="Text 3"/>
+          <p:cNvSpPr/>
+          <p:nvPr/>
+        </p:nvSpPr>
+        <p:spPr>
+          <a:xfrm>
+            <a:off x="731520" y="1325880"/>
+            <a:ext cx="7680960" cy="822960"/>
+          </a:xfrm>
+          <a:prstGeom prst="rect">
+            <a:avLst/>
+          </a:prstGeom>
+          <a:noFill/>
+          <a:ln/>
+        </p:spPr>
+        <p:txBody>
+          <a:bodyPr wrap="square" lIns="0" tIns="0" rIns="0" bIns="0" rtlCol="0" anchor="ctr">
+            <a:normAutofit/>
+          </a:bodyPr>
+          <a:lstStyle/>
+          <a:p>
+            <a:pPr indent="0" marL="0">
+              <a:buNone/>
+            </a:pPr>
+            <a:r>
+              <a:rPr lang="en-US" sz="1400" i="1" dirty="0">
+                <a:solidFill>
+                  <a:srgbClr val="E35205"/>
+                </a:solidFill>
+                <a:latin typeface="Calibri" pitchFamily="34" charset="0"/>
+                <a:ea typeface="Calibri" pitchFamily="34" charset="-122"/>
+                <a:cs typeface="Calibri" pitchFamily="34" charset="-120"/>
+              </a:rPr>
+              <a:t>📋 Worksheet 3 — labs/week03-cryptography/worksheet.md (Part 3) · kickoff: docker compose up (runs the crypto scripts)</a:t>
+            </a:r>
+            <a:endParaRPr lang="en-US" sz="1400" dirty="0"/>
+          </a:p>
+        </p:txBody>
+      </p:sp>
+      <p:sp>
+        <p:nvSpPr>
+          <p:cNvPr id="7" name="Shape 4"/>
+          <p:cNvSpPr/>
+          <p:nvPr/>
+        </p:nvSpPr>
+        <p:spPr>
+          <a:xfrm>
+            <a:off x="457200" y="2313432"/>
+            <a:ext cx="8229600" cy="1719072"/>
+          </a:xfrm>
+          <a:prstGeom prst="roundRect">
+            <a:avLst>
+              <a:gd name="adj" fmla="val 4255"/>
             </a:avLst>
           </a:prstGeom>
           <a:solidFill>
@@ -3837,14 +3830,14 @@
       </p:sp>
       <p:sp>
         <p:nvSpPr>
-          <p:cNvPr id="6" name="Text 3"/>
-          <p:cNvSpPr/>
-          <p:nvPr/>
-        </p:nvSpPr>
-        <p:spPr>
-          <a:xfrm>
-            <a:off x="731520" y="1435608"/>
-            <a:ext cx="7680960" cy="1078992"/>
+          <p:cNvPr id="8" name="Text 5"/>
+          <p:cNvSpPr/>
+          <p:nvPr/>
+        </p:nvSpPr>
+        <p:spPr>
+          <a:xfrm>
+            <a:off x="731520" y="2423160"/>
+            <a:ext cx="7680960" cy="1499616"/>
           </a:xfrm>
           <a:prstGeom prst="rect">
             <a:avLst/>
@@ -3874,7 +3867,7 @@
                 <a:ea typeface="Calibri" pitchFamily="34" charset="-122"/>
                 <a:cs typeface="Calibri" pitchFamily="34" charset="-120"/>
               </a:rPr>
-              <a:t>Every screenshot needs your whoami + student ID + timestamp in-frame — this lab's raw output is identical for the whole cohort by design, so unstamped evidence isn't gradable</a:t>
+              <a:t>Cracked hashes + method · ECB-leak proof · predictable-token note</a:t>
             </a:r>
             <a:endParaRPr lang="en-US" sz="1400" dirty="0"/>
           </a:p>
@@ -3895,45 +3888,87 @@
                 <a:ea typeface="Calibri" pitchFamily="34" charset="-122"/>
                 <a:cs typeface="Calibri" pitchFamily="34" charset="-120"/>
               </a:rPr>
-              <a:t>+ Audit the AI / EiPE / Prompt Problem (see worksheet)</a:t>
+              <a:t>Before/after code (misuse → fix → CWE closed) — incl. your rehash-on-login migration + GCM decrypt/tamper-check</a:t>
             </a:r>
             <a:endParaRPr lang="en-US" sz="1400" dirty="0"/>
           </a:p>
-        </p:txBody>
-      </p:sp>
-      <p:sp>
-        <p:nvSpPr>
-          <p:cNvPr id="7" name="Text 4"/>
-          <p:cNvSpPr/>
-          <p:nvPr/>
-        </p:nvSpPr>
-        <p:spPr>
-          <a:xfrm>
-            <a:off x="457200" y="4800600"/>
-            <a:ext cx="6949440" cy="274320"/>
-          </a:xfrm>
-          <a:prstGeom prst="rect">
-            <a:avLst/>
-          </a:prstGeom>
-          <a:noFill/>
-          <a:ln/>
-        </p:spPr>
-        <p:txBody>
-          <a:bodyPr wrap="square" lIns="0" tIns="0" rIns="0" bIns="0" rtlCol="0" anchor="ctr"/>
-          <a:lstStyle/>
-          <a:p>
-            <a:pPr indent="0" marL="0">
-              <a:buNone/>
-            </a:pPr>
-            <a:r>
-              <a:rPr lang="en-US" sz="900" dirty="0">
-                <a:solidFill>
-                  <a:srgbClr val="64748B"/>
+          <a:p>
+            <a:pPr marL="342900" indent="-342900">
+              <a:spcAft>
+                <a:spcPts val="600"/>
+              </a:spcAft>
+              <a:buSzPct val="100000"/>
+              <a:buChar char="•"/>
+            </a:pPr>
+            <a:r>
+              <a:rPr lang="en-US" sz="1400" dirty="0">
+                <a:solidFill>
+                  <a:srgbClr val="1F2937"/>
                 </a:solidFill>
                 <a:latin typeface="Calibri" pitchFamily="34" charset="0"/>
                 <a:ea typeface="Calibri" pitchFamily="34" charset="-122"/>
                 <a:cs typeface="Calibri" pitchFamily="34" charset="-120"/>
               </a:rPr>
+              <a:t>TLS: read a real cert's issuer/subject/validity + negotiated protocol version</a:t>
+            </a:r>
+            <a:endParaRPr lang="en-US" sz="1400" dirty="0"/>
+          </a:p>
+          <a:p>
+            <a:pPr marL="342900" indent="-342900">
+              <a:spcAft>
+                <a:spcPts val="600"/>
+              </a:spcAft>
+              <a:buSzPct val="100000"/>
+              <a:buChar char="•"/>
+            </a:pPr>
+            <a:r>
+              <a:rPr lang="en-US" sz="1400" dirty="0">
+                <a:solidFill>
+                  <a:srgbClr val="1F2937"/>
+                </a:solidFill>
+                <a:latin typeface="Calibri" pitchFamily="34" charset="0"/>
+                <a:ea typeface="Calibri" pitchFamily="34" charset="-122"/>
+                <a:cs typeface="Calibri" pitchFamily="34" charset="-120"/>
+              </a:rPr>
+              <a:t>Crack NoteVault's own MD5 hashes for the term-project report</a:t>
+            </a:r>
+            <a:endParaRPr lang="en-US" sz="1400" dirty="0"/>
+          </a:p>
+        </p:txBody>
+      </p:sp>
+      <p:sp>
+        <p:nvSpPr>
+          <p:cNvPr id="9" name="Text 6"/>
+          <p:cNvSpPr/>
+          <p:nvPr/>
+        </p:nvSpPr>
+        <p:spPr>
+          <a:xfrm>
+            <a:off x="457200" y="4800600"/>
+            <a:ext cx="6949440" cy="274320"/>
+          </a:xfrm>
+          <a:prstGeom prst="rect">
+            <a:avLst/>
+          </a:prstGeom>
+          <a:noFill/>
+          <a:ln/>
+        </p:spPr>
+        <p:txBody>
+          <a:bodyPr wrap="square" lIns="0" tIns="0" rIns="0" bIns="0" rtlCol="0" anchor="ctr"/>
+          <a:lstStyle/>
+          <a:p>
+            <a:pPr indent="0" marL="0">
+              <a:buNone/>
+            </a:pPr>
+            <a:r>
+              <a:rPr lang="en-US" sz="900" dirty="0">
+                <a:solidFill>
+                  <a:srgbClr val="64748B"/>
+                </a:solidFill>
+                <a:latin typeface="Calibri" pitchFamily="34" charset="0"/>
+                <a:ea typeface="Calibri" pitchFamily="34" charset="-122"/>
+                <a:cs typeface="Calibri" pitchFamily="34" charset="-120"/>
+              </a:rPr>
               <a:t>Software Security · Week 3</a:t>
             </a:r>
             <a:endParaRPr lang="en-US" sz="900" dirty="0"/>
@@ -3942,7 +3977,7 @@
       </p:sp>
       <p:pic>
         <p:nvPicPr>
-          <p:cNvPr id="8" name="Image 1" descr="/Users/pop7/Library/CloudStorage/OneDrive-MonsterConnectCo.,Ltd/Lecture/KOSEN69 - software-security/slides/pptx/assets/logo-small.png">    </p:cNvPr>
+          <p:cNvPr id="10" name="Image 1" descr="/Users/pop7/Library/CloudStorage/OneDrive-MonsterConnectCo.,Ltd/Lecture/KOSEN69 - software-security/slides/pptx/assets/logo-small.png">    </p:cNvPr>
           <p:cNvPicPr>
             <a:picLocks noChangeAspect="1"/>
           </p:cNvPicPr>
@@ -4080,7 +4115,7 @@
                 <a:ea typeface="Arial" pitchFamily="34" charset="-122"/>
                 <a:cs typeface="Arial" pitchFamily="34" charset="-120"/>
               </a:rPr>
-              <a:t>Key takeaways</a:t>
+              <a:t>Lab 3 — deliverable (cont.)</a:t>
             </a:r>
             <a:endParaRPr lang="en-US" sz="2600" dirty="0"/>
           </a:p>
@@ -4095,11 +4130,11 @@
         <p:spPr>
           <a:xfrm>
             <a:off x="457200" y="1325880"/>
-            <a:ext cx="8229600" cy="1207008"/>
+            <a:ext cx="8229600" cy="1298448"/>
           </a:xfrm>
           <a:prstGeom prst="roundRect">
             <a:avLst>
-              <a:gd name="adj" fmla="val 6061"/>
+              <a:gd name="adj" fmla="val 5634"/>
             </a:avLst>
           </a:prstGeom>
           <a:solidFill>
@@ -4124,7 +4159,7 @@
         <p:spPr>
           <a:xfrm>
             <a:off x="731520" y="1435608"/>
-            <a:ext cx="7680960" cy="987552"/>
+            <a:ext cx="7680960" cy="1078992"/>
           </a:xfrm>
           <a:prstGeom prst="rect">
             <a:avLst/>
@@ -4154,7 +4189,7 @@
                 <a:ea typeface="Calibri" pitchFamily="34" charset="-122"/>
                 <a:cs typeface="Calibri" pitchFamily="34" charset="-120"/>
               </a:rPr>
-              <a:t>Encoding ≠ encryption; hashing isn't reversible</a:t>
+              <a:t>Every screenshot needs your whoami + student ID + timestamp in-frame — this lab's raw output is identical for the whole cohort by design, so unstamped evidence isn't gradable</a:t>
             </a:r>
             <a:endParaRPr lang="en-US" sz="1400" dirty="0"/>
           </a:p>
@@ -4175,28 +4210,7 @@
                 <a:ea typeface="Calibri" pitchFamily="34" charset="-122"/>
                 <a:cs typeface="Calibri" pitchFamily="34" charset="-120"/>
               </a:rPr>
-              <a:t>Use vetted KDFs + authenticated encryption — never roll your own</a:t>
-            </a:r>
-            <a:endParaRPr lang="en-US" sz="1400" dirty="0"/>
-          </a:p>
-          <a:p>
-            <a:pPr marL="342900" indent="-342900">
-              <a:spcAft>
-                <a:spcPts val="600"/>
-              </a:spcAft>
-              <a:buSzPct val="100000"/>
-              <a:buChar char="•"/>
-            </a:pPr>
-            <a:r>
-              <a:rPr lang="en-US" sz="1400" dirty="0">
-                <a:solidFill>
-                  <a:srgbClr val="1F2937"/>
-                </a:solidFill>
-                <a:latin typeface="Calibri" pitchFamily="34" charset="0"/>
-                <a:ea typeface="Calibri" pitchFamily="34" charset="-122"/>
-                <a:cs typeface="Calibri" pitchFamily="34" charset="-120"/>
-              </a:rPr>
-              <a:t>Randomness &amp; key handling matter as much as the algorithm</a:t>
+              <a:t>+ Audit the AI / EiPE / Prompt Problem (see worksheet)</a:t>
             </a:r>
             <a:endParaRPr lang="en-US" sz="1400" dirty="0"/>
           </a:p>
@@ -4299,6 +4313,307 @@
       </p:grpSpPr>
       <p:sp>
         <p:nvSpPr>
+          <p:cNvPr id="2" name="Shape 0"/>
+          <p:cNvSpPr/>
+          <p:nvPr/>
+        </p:nvSpPr>
+        <p:spPr>
+          <a:xfrm>
+            <a:off x="457200" y="384048"/>
+            <a:ext cx="530352" cy="530352"/>
+          </a:xfrm>
+          <a:prstGeom prst="ellipse">
+            <a:avLst/>
+          </a:prstGeom>
+          <a:solidFill>
+            <a:srgbClr val="E35205"/>
+          </a:solidFill>
+          <a:ln/>
+          <a:effectLst>
+            <a:outerShdw sx="100000" sy="100000" kx="0" ky="0" algn="bl" rotWithShape="0" blurRad="76200" dist="25400" dir="5400000">
+              <a:srgbClr val="000000">
+                <a:alpha val="12000"/>
+              </a:srgbClr>
+            </a:outerShdw>
+          </a:effectLst>
+        </p:spPr>
+      </p:sp>
+      <p:pic>
+        <p:nvPicPr>
+          <p:cNvPr id="3" name="Image 0" descr="preencoded.png">    </p:cNvPr>
+          <p:cNvPicPr>
+            <a:picLocks noChangeAspect="1"/>
+          </p:cNvPicPr>
+          <p:nvPr/>
+        </p:nvPicPr>
+        <p:blipFill>
+          <a:blip r:embed="rId1"/>
+          <a:stretch>
+            <a:fillRect/>
+          </a:stretch>
+        </p:blipFill>
+        <p:spPr>
+          <a:xfrm>
+            <a:off x="594360" y="521208"/>
+            <a:ext cx="256032" cy="256032"/>
+          </a:xfrm>
+          <a:prstGeom prst="rect">
+            <a:avLst/>
+          </a:prstGeom>
+        </p:spPr>
+      </p:pic>
+      <p:sp>
+        <p:nvSpPr>
+          <p:cNvPr id="4" name="Text 1"/>
+          <p:cNvSpPr/>
+          <p:nvPr/>
+        </p:nvSpPr>
+        <p:spPr>
+          <a:xfrm>
+            <a:off x="1143000" y="329184"/>
+            <a:ext cx="7498080" cy="603504"/>
+          </a:xfrm>
+          <a:prstGeom prst="rect">
+            <a:avLst/>
+          </a:prstGeom>
+          <a:noFill/>
+          <a:ln/>
+        </p:spPr>
+        <p:txBody>
+          <a:bodyPr wrap="square" lIns="0" tIns="0" rIns="0" bIns="0" rtlCol="0" anchor="ctr"/>
+          <a:lstStyle/>
+          <a:p>
+            <a:pPr indent="0" marL="0">
+              <a:buNone/>
+            </a:pPr>
+            <a:r>
+              <a:rPr lang="en-US" sz="2600" b="1" dirty="0">
+                <a:solidFill>
+                  <a:srgbClr val="1F2937"/>
+                </a:solidFill>
+                <a:latin typeface="Arial" pitchFamily="34" charset="0"/>
+                <a:ea typeface="Arial" pitchFamily="34" charset="-122"/>
+                <a:cs typeface="Arial" pitchFamily="34" charset="-120"/>
+              </a:rPr>
+              <a:t>Key takeaways</a:t>
+            </a:r>
+            <a:endParaRPr lang="en-US" sz="2600" dirty="0"/>
+          </a:p>
+        </p:txBody>
+      </p:sp>
+      <p:sp>
+        <p:nvSpPr>
+          <p:cNvPr id="5" name="Shape 2"/>
+          <p:cNvSpPr/>
+          <p:nvPr/>
+        </p:nvSpPr>
+        <p:spPr>
+          <a:xfrm>
+            <a:off x="457200" y="1325880"/>
+            <a:ext cx="8229600" cy="1207008"/>
+          </a:xfrm>
+          <a:prstGeom prst="roundRect">
+            <a:avLst>
+              <a:gd name="adj" fmla="val 6061"/>
+            </a:avLst>
+          </a:prstGeom>
+          <a:solidFill>
+            <a:srgbClr val="F1F5F9"/>
+          </a:solidFill>
+          <a:ln/>
+          <a:effectLst>
+            <a:outerShdw sx="100000" sy="100000" kx="0" ky="0" algn="bl" rotWithShape="0" blurRad="76200" dist="25400" dir="5400000">
+              <a:srgbClr val="000000">
+                <a:alpha val="12000"/>
+              </a:srgbClr>
+            </a:outerShdw>
+          </a:effectLst>
+        </p:spPr>
+      </p:sp>
+      <p:sp>
+        <p:nvSpPr>
+          <p:cNvPr id="6" name="Text 3"/>
+          <p:cNvSpPr/>
+          <p:nvPr/>
+        </p:nvSpPr>
+        <p:spPr>
+          <a:xfrm>
+            <a:off x="731520" y="1435608"/>
+            <a:ext cx="7680960" cy="987552"/>
+          </a:xfrm>
+          <a:prstGeom prst="rect">
+            <a:avLst/>
+          </a:prstGeom>
+          <a:noFill/>
+          <a:ln/>
+        </p:spPr>
+        <p:txBody>
+          <a:bodyPr wrap="square" lIns="0" tIns="0" rIns="0" bIns="0" rtlCol="0" anchor="t">
+            <a:normAutofit/>
+          </a:bodyPr>
+          <a:lstStyle/>
+          <a:p>
+            <a:pPr marL="342900" indent="-342900">
+              <a:spcAft>
+                <a:spcPts val="600"/>
+              </a:spcAft>
+              <a:buSzPct val="100000"/>
+              <a:buChar char="•"/>
+            </a:pPr>
+            <a:r>
+              <a:rPr lang="en-US" sz="1400" dirty="0">
+                <a:solidFill>
+                  <a:srgbClr val="1F2937"/>
+                </a:solidFill>
+                <a:latin typeface="Calibri" pitchFamily="34" charset="0"/>
+                <a:ea typeface="Calibri" pitchFamily="34" charset="-122"/>
+                <a:cs typeface="Calibri" pitchFamily="34" charset="-120"/>
+              </a:rPr>
+              <a:t>Encoding ≠ encryption; hashing isn't reversible</a:t>
+            </a:r>
+            <a:endParaRPr lang="en-US" sz="1400" dirty="0"/>
+          </a:p>
+          <a:p>
+            <a:pPr marL="342900" indent="-342900">
+              <a:spcAft>
+                <a:spcPts val="600"/>
+              </a:spcAft>
+              <a:buSzPct val="100000"/>
+              <a:buChar char="•"/>
+            </a:pPr>
+            <a:r>
+              <a:rPr lang="en-US" sz="1400" dirty="0">
+                <a:solidFill>
+                  <a:srgbClr val="1F2937"/>
+                </a:solidFill>
+                <a:latin typeface="Calibri" pitchFamily="34" charset="0"/>
+                <a:ea typeface="Calibri" pitchFamily="34" charset="-122"/>
+                <a:cs typeface="Calibri" pitchFamily="34" charset="-120"/>
+              </a:rPr>
+              <a:t>Use vetted KDFs + authenticated encryption — never roll your own</a:t>
+            </a:r>
+            <a:endParaRPr lang="en-US" sz="1400" dirty="0"/>
+          </a:p>
+          <a:p>
+            <a:pPr marL="342900" indent="-342900">
+              <a:spcAft>
+                <a:spcPts val="600"/>
+              </a:spcAft>
+              <a:buSzPct val="100000"/>
+              <a:buChar char="•"/>
+            </a:pPr>
+            <a:r>
+              <a:rPr lang="en-US" sz="1400" dirty="0">
+                <a:solidFill>
+                  <a:srgbClr val="1F2937"/>
+                </a:solidFill>
+                <a:latin typeface="Calibri" pitchFamily="34" charset="0"/>
+                <a:ea typeface="Calibri" pitchFamily="34" charset="-122"/>
+                <a:cs typeface="Calibri" pitchFamily="34" charset="-120"/>
+              </a:rPr>
+              <a:t>Randomness &amp; key handling matter as much as the algorithm</a:t>
+            </a:r>
+            <a:endParaRPr lang="en-US" sz="1400" dirty="0"/>
+          </a:p>
+        </p:txBody>
+      </p:sp>
+      <p:sp>
+        <p:nvSpPr>
+          <p:cNvPr id="7" name="Text 4"/>
+          <p:cNvSpPr/>
+          <p:nvPr/>
+        </p:nvSpPr>
+        <p:spPr>
+          <a:xfrm>
+            <a:off x="457200" y="4800600"/>
+            <a:ext cx="6949440" cy="274320"/>
+          </a:xfrm>
+          <a:prstGeom prst="rect">
+            <a:avLst/>
+          </a:prstGeom>
+          <a:noFill/>
+          <a:ln/>
+        </p:spPr>
+        <p:txBody>
+          <a:bodyPr wrap="square" lIns="0" tIns="0" rIns="0" bIns="0" rtlCol="0" anchor="ctr"/>
+          <a:lstStyle/>
+          <a:p>
+            <a:pPr indent="0" marL="0">
+              <a:buNone/>
+            </a:pPr>
+            <a:r>
+              <a:rPr lang="en-US" sz="900" dirty="0">
+                <a:solidFill>
+                  <a:srgbClr val="64748B"/>
+                </a:solidFill>
+                <a:latin typeface="Calibri" pitchFamily="34" charset="0"/>
+                <a:ea typeface="Calibri" pitchFamily="34" charset="-122"/>
+                <a:cs typeface="Calibri" pitchFamily="34" charset="-120"/>
+              </a:rPr>
+              <a:t>Software Security · Week 3</a:t>
+            </a:r>
+            <a:endParaRPr lang="en-US" sz="900" dirty="0"/>
+          </a:p>
+        </p:txBody>
+      </p:sp>
+      <p:pic>
+        <p:nvPicPr>
+          <p:cNvPr id="8" name="Image 1" descr="/Users/pop7/Library/CloudStorage/OneDrive-MonsterConnectCo.,Ltd/Lecture/KOSEN69 - software-security/slides/pptx/assets/logo-small.png">    </p:cNvPr>
+          <p:cNvPicPr>
+            <a:picLocks noChangeAspect="1"/>
+          </p:cNvPicPr>
+          <p:nvPr/>
+        </p:nvPicPr>
+        <p:blipFill>
+          <a:blip r:embed="rId2"/>
+          <a:stretch>
+            <a:fillRect/>
+          </a:stretch>
+        </p:blipFill>
+        <p:spPr>
+          <a:xfrm>
+            <a:off x="7882128" y="4700016"/>
+            <a:ext cx="768096" cy="356616"/>
+          </a:xfrm>
+          <a:prstGeom prst="rect">
+            <a:avLst/>
+          </a:prstGeom>
+        </p:spPr>
+      </p:pic>
+    </p:spTree>
+  </p:cSld>
+  <p:clrMapOvr>
+    <a:masterClrMapping/>
+  </p:clrMapOvr>
+</p:sld>
+</file>
+
+<file path=ppt/slides/slide17.xml><?xml version="1.0" encoding="utf-8"?>
+<p:sld xmlns:a="http://schemas.openxmlformats.org/drawingml/2006/main" xmlns:r="http://schemas.openxmlformats.org/officeDocument/2006/relationships" xmlns:p="http://schemas.openxmlformats.org/presentationml/2006/main">
+  <p:cSld name="Slide 17">
+    <p:bg>
+      <p:bgPr>
+        <a:solidFill>
+          <a:srgbClr val="FFFFFF"/>
+        </a:solidFill>
+      </p:bgPr>
+    </p:bg>
+    <p:spTree>
+      <p:nvGrpSpPr>
+        <p:cNvPr id="1" name=""/>
+        <p:cNvGrpSpPr/>
+        <p:nvPr/>
+      </p:nvGrpSpPr>
+      <p:grpSpPr>
+        <a:xfrm>
+          <a:off x="0" y="0"/>
+          <a:ext cx="0" cy="0"/>
+          <a:chOff x="0" y="0"/>
+          <a:chExt cx="0" cy="0"/>
+        </a:xfrm>
+      </p:grpSpPr>
+      <p:sp>
+        <p:nvSpPr>
           <p:cNvPr id="2" name="Text 0"/>
           <p:cNvSpPr/>
           <p:nvPr/>
@@ -6141,96 +6456,11 @@
         <p:spPr>
           <a:xfrm>
             <a:off x="457200" y="1325880"/>
-            <a:ext cx="8229600" cy="713232"/>
+            <a:ext cx="8229600" cy="1920240"/>
           </a:xfrm>
           <a:prstGeom prst="roundRect">
             <a:avLst>
-              <a:gd name="adj" fmla="val 7692"/>
-            </a:avLst>
-          </a:prstGeom>
-          <a:solidFill>
-            <a:srgbClr val="0A1020"/>
-          </a:solidFill>
-          <a:ln w="12700">
-            <a:solidFill>
-              <a:srgbClr val="E8EDF3"/>
-            </a:solidFill>
-            <a:prstDash val="solid"/>
-          </a:ln>
-        </p:spPr>
-      </p:sp>
-      <p:sp>
-        <p:nvSpPr>
-          <p:cNvPr id="6" name="Text 3"/>
-          <p:cNvSpPr/>
-          <p:nvPr/>
-        </p:nvSpPr>
-        <p:spPr>
-          <a:xfrm>
-            <a:off x="640080" y="1399032"/>
-            <a:ext cx="7863840" cy="566928"/>
-          </a:xfrm>
-          <a:prstGeom prst="rect">
-            <a:avLst/>
-          </a:prstGeom>
-          <a:noFill/>
-          <a:ln/>
-        </p:spPr>
-        <p:txBody>
-          <a:bodyPr wrap="square" lIns="0" tIns="0" rIns="0" bIns="0" rtlCol="0" anchor="t">
-            <a:normAutofit/>
-          </a:bodyPr>
-          <a:lstStyle/>
-          <a:p>
-            <a:pPr indent="0" marL="0">
-              <a:buNone/>
-            </a:pPr>
-            <a:r>
-              <a:rPr lang="en-US" sz="1150" dirty="0">
-                <a:solidFill>
-                  <a:srgbClr val="9FE7D6"/>
-                </a:solidFill>
-                <a:latin typeface="Courier New" pitchFamily="34" charset="0"/>
-                <a:ea typeface="Courier New" pitchFamily="34" charset="-122"/>
-                <a:cs typeface="Courier New" pitchFamily="34" charset="-120"/>
-              </a:rPr>
-              <a:t>plaintext blocks:   [AAAA][AAAA][BBBB][AAAA]</a:t>
-            </a:r>
-            <a:endParaRPr lang="en-US" sz="1150" dirty="0"/>
-          </a:p>
-          <a:p>
-            <a:pPr indent="0" marL="0">
-              <a:buNone/>
-            </a:pPr>
-            <a:r>
-              <a:rPr lang="en-US" sz="1150" dirty="0">
-                <a:solidFill>
-                  <a:srgbClr val="9FE7D6"/>
-                </a:solidFill>
-                <a:latin typeface="Courier New" pitchFamily="34" charset="0"/>
-                <a:ea typeface="Courier New" pitchFamily="34" charset="-122"/>
-                <a:cs typeface="Courier New" pitchFamily="34" charset="-120"/>
-              </a:rPr>
-              <a:t>AES-ECB ciphertext: [ X  ][ X  ][ Y  ][ X  ]   ← same block → same cipher</a:t>
-            </a:r>
-            <a:endParaRPr lang="en-US" sz="1150" dirty="0"/>
-          </a:p>
-        </p:txBody>
-      </p:sp>
-      <p:sp>
-        <p:nvSpPr>
-          <p:cNvPr id="7" name="Shape 4"/>
-          <p:cNvSpPr/>
-          <p:nvPr/>
-        </p:nvSpPr>
-        <p:spPr>
-          <a:xfrm>
-            <a:off x="457200" y="2203704"/>
-            <a:ext cx="8229600" cy="2121408"/>
-          </a:xfrm>
-          <a:prstGeom prst="roundRect">
-            <a:avLst>
-              <a:gd name="adj" fmla="val 3448"/>
+              <a:gd name="adj" fmla="val 3810"/>
             </a:avLst>
           </a:prstGeom>
           <a:solidFill>
@@ -6248,14 +6478,14 @@
       </p:sp>
       <p:sp>
         <p:nvSpPr>
-          <p:cNvPr id="8" name="Text 5"/>
-          <p:cNvSpPr/>
-          <p:nvPr/>
-        </p:nvSpPr>
-        <p:spPr>
-          <a:xfrm>
-            <a:off x="731520" y="2313432"/>
-            <a:ext cx="7680960" cy="1901952"/>
+          <p:cNvPr id="6" name="Text 3"/>
+          <p:cNvSpPr/>
+          <p:nvPr/>
+        </p:nvSpPr>
+        <p:spPr>
+          <a:xfrm>
+            <a:off x="731520" y="1435608"/>
+            <a:ext cx="7680960" cy="1700784"/>
           </a:xfrm>
           <a:prstGeom prst="rect">
             <a:avLst/>
@@ -6327,7 +6557,7 @@
                 <a:ea typeface="Calibri" pitchFamily="34" charset="-122"/>
                 <a:cs typeface="Calibri" pitchFamily="34" charset="-120"/>
               </a:rPr>
-              <a:t>CBC isn't the fix either — no integrity check means an attacker can flip bits in the ciphertext and the corresponding plaintext bits flip predictably (try it in the aes-modes sim: flip a bit in a sess=...;admin=0;... token)</a:t>
+              <a:t>CBC isn't the fix either — no integrity check means an attacker can flip bits in the ciphertext and the corresponding plaintext bits flip predictably</a:t>
             </a:r>
             <a:endParaRPr lang="en-US" sz="1400" dirty="0"/>
           </a:p>
@@ -6356,14 +6586,14 @@
       </p:sp>
       <p:sp>
         <p:nvSpPr>
-          <p:cNvPr id="9" name="Text 6"/>
-          <p:cNvSpPr/>
-          <p:nvPr/>
-        </p:nvSpPr>
-        <p:spPr>
-          <a:xfrm>
-            <a:off x="457200" y="4800600"/>
-            <a:ext cx="6949440" cy="274320"/>
+          <p:cNvPr id="7" name="Text 4"/>
+          <p:cNvSpPr/>
+          <p:nvPr/>
+        </p:nvSpPr>
+        <p:spPr>
+          <a:xfrm>
+            <a:off x="548640" y="3410712"/>
+            <a:ext cx="8046720" cy="548640"/>
           </a:xfrm>
           <a:prstGeom prst="rect">
             <a:avLst/>
@@ -6372,21 +6602,62 @@
           <a:ln/>
         </p:spPr>
         <p:txBody>
-          <a:bodyPr wrap="square" lIns="0" tIns="0" rIns="0" bIns="0" rtlCol="0" anchor="ctr"/>
+          <a:bodyPr wrap="square" lIns="0" tIns="0" rIns="0" bIns="0" rtlCol="0" anchor="t">
+            <a:normAutofit/>
+          </a:bodyPr>
           <a:lstStyle/>
           <a:p>
             <a:pPr indent="0" marL="0">
               <a:buNone/>
             </a:pPr>
             <a:r>
-              <a:rPr lang="en-US" sz="900" dirty="0">
-                <a:solidFill>
-                  <a:srgbClr val="64748B"/>
+              <a:rPr lang="en-US" sz="1400" dirty="0">
+                <a:solidFill>
+                  <a:srgbClr val="1F2937"/>
                 </a:solidFill>
                 <a:latin typeface="Calibri" pitchFamily="34" charset="0"/>
                 <a:ea typeface="Calibri" pitchFamily="34" charset="-122"/>
                 <a:cs typeface="Calibri" pitchFamily="34" charset="-120"/>
               </a:rPr>
+              <a:t>Try it live: /sim/aes-modes (interactive simulation, web only)</a:t>
+            </a:r>
+            <a:endParaRPr lang="en-US" sz="1400" dirty="0"/>
+          </a:p>
+        </p:txBody>
+      </p:sp>
+      <p:sp>
+        <p:nvSpPr>
+          <p:cNvPr id="8" name="Text 5"/>
+          <p:cNvSpPr/>
+          <p:nvPr/>
+        </p:nvSpPr>
+        <p:spPr>
+          <a:xfrm>
+            <a:off x="457200" y="4800600"/>
+            <a:ext cx="6949440" cy="274320"/>
+          </a:xfrm>
+          <a:prstGeom prst="rect">
+            <a:avLst/>
+          </a:prstGeom>
+          <a:noFill/>
+          <a:ln/>
+        </p:spPr>
+        <p:txBody>
+          <a:bodyPr wrap="square" lIns="0" tIns="0" rIns="0" bIns="0" rtlCol="0" anchor="ctr"/>
+          <a:lstStyle/>
+          <a:p>
+            <a:pPr indent="0" marL="0">
+              <a:buNone/>
+            </a:pPr>
+            <a:r>
+              <a:rPr lang="en-US" sz="900" dirty="0">
+                <a:solidFill>
+                  <a:srgbClr val="64748B"/>
+                </a:solidFill>
+                <a:latin typeface="Calibri" pitchFamily="34" charset="0"/>
+                <a:ea typeface="Calibri" pitchFamily="34" charset="-122"/>
+                <a:cs typeface="Calibri" pitchFamily="34" charset="-120"/>
+              </a:rPr>
               <a:t>Software Security · Week 3</a:t>
             </a:r>
             <a:endParaRPr lang="en-US" sz="900" dirty="0"/>
@@ -6395,7 +6666,7 @@
       </p:sp>
       <p:pic>
         <p:nvPicPr>
-          <p:cNvPr id="10" name="Image 1" descr="/Users/pop7/Library/CloudStorage/OneDrive-MonsterConnectCo.,Ltd/Lecture/KOSEN69 - software-security/slides/pptx/assets/logo-small.png">    </p:cNvPr>
+          <p:cNvPr id="9" name="Image 1" descr="/Users/pop7/Library/CloudStorage/OneDrive-MonsterConnectCo.,Ltd/Lecture/KOSEN69 - software-security/slides/pptx/assets/logo-small.png">    </p:cNvPr>
           <p:cNvPicPr>
             <a:picLocks noChangeAspect="1"/>
           </p:cNvPicPr>
